--- a/Fall 2026/Week 3 -- Suffix Arrays BWT Alignment Tools File Formats.pptx
+++ b/Fall 2026/Week 3 -- Suffix Arrays BWT Alignment Tools File Formats.pptx
@@ -5,7 +5,7 @@
     <p:sldMasterId id="2147483648" r:id="rId1"/>
   </p:sldMasterIdLst>
   <p:notesMasterIdLst>
-    <p:notesMasterId r:id="rId76"/>
+    <p:notesMasterId r:id="rId77"/>
   </p:notesMasterIdLst>
   <p:sldIdLst>
     <p:sldId id="272" r:id="rId2"/>
@@ -51,37 +51,38 @@
     <p:sldId id="580" r:id="rId42"/>
     <p:sldId id="270" r:id="rId43"/>
     <p:sldId id="581" r:id="rId44"/>
-    <p:sldId id="583" r:id="rId45"/>
-    <p:sldId id="582" r:id="rId46"/>
-    <p:sldId id="584" r:id="rId47"/>
-    <p:sldId id="401" r:id="rId48"/>
-    <p:sldId id="402" r:id="rId49"/>
-    <p:sldId id="403" r:id="rId50"/>
-    <p:sldId id="273" r:id="rId51"/>
-    <p:sldId id="602" r:id="rId52"/>
-    <p:sldId id="280" r:id="rId53"/>
-    <p:sldId id="588" r:id="rId54"/>
-    <p:sldId id="589" r:id="rId55"/>
-    <p:sldId id="590" r:id="rId56"/>
-    <p:sldId id="586" r:id="rId57"/>
-    <p:sldId id="276" r:id="rId58"/>
-    <p:sldId id="281" r:id="rId59"/>
-    <p:sldId id="587" r:id="rId60"/>
-    <p:sldId id="261" r:id="rId61"/>
-    <p:sldId id="585" r:id="rId62"/>
-    <p:sldId id="263" r:id="rId63"/>
-    <p:sldId id="603" r:id="rId64"/>
-    <p:sldId id="264" r:id="rId65"/>
-    <p:sldId id="604" r:id="rId66"/>
-    <p:sldId id="265" r:id="rId67"/>
-    <p:sldId id="266" r:id="rId68"/>
-    <p:sldId id="262" r:id="rId69"/>
-    <p:sldId id="605" r:id="rId70"/>
-    <p:sldId id="606" r:id="rId71"/>
-    <p:sldId id="610" r:id="rId72"/>
-    <p:sldId id="607" r:id="rId73"/>
-    <p:sldId id="608" r:id="rId74"/>
-    <p:sldId id="609" r:id="rId75"/>
+    <p:sldId id="611" r:id="rId45"/>
+    <p:sldId id="583" r:id="rId46"/>
+    <p:sldId id="582" r:id="rId47"/>
+    <p:sldId id="584" r:id="rId48"/>
+    <p:sldId id="401" r:id="rId49"/>
+    <p:sldId id="402" r:id="rId50"/>
+    <p:sldId id="403" r:id="rId51"/>
+    <p:sldId id="273" r:id="rId52"/>
+    <p:sldId id="602" r:id="rId53"/>
+    <p:sldId id="280" r:id="rId54"/>
+    <p:sldId id="588" r:id="rId55"/>
+    <p:sldId id="589" r:id="rId56"/>
+    <p:sldId id="590" r:id="rId57"/>
+    <p:sldId id="586" r:id="rId58"/>
+    <p:sldId id="276" r:id="rId59"/>
+    <p:sldId id="281" r:id="rId60"/>
+    <p:sldId id="587" r:id="rId61"/>
+    <p:sldId id="261" r:id="rId62"/>
+    <p:sldId id="585" r:id="rId63"/>
+    <p:sldId id="263" r:id="rId64"/>
+    <p:sldId id="603" r:id="rId65"/>
+    <p:sldId id="264" r:id="rId66"/>
+    <p:sldId id="604" r:id="rId67"/>
+    <p:sldId id="265" r:id="rId68"/>
+    <p:sldId id="266" r:id="rId69"/>
+    <p:sldId id="262" r:id="rId70"/>
+    <p:sldId id="605" r:id="rId71"/>
+    <p:sldId id="606" r:id="rId72"/>
+    <p:sldId id="610" r:id="rId73"/>
+    <p:sldId id="607" r:id="rId74"/>
+    <p:sldId id="608" r:id="rId75"/>
+    <p:sldId id="609" r:id="rId76"/>
   </p:sldIdLst>
   <p:sldSz cx="12192000" cy="6858000"/>
   <p:notesSz cx="6858000" cy="9144000"/>
@@ -202,7 +203,7 @@
 <file path=ppt/revisionInfo.xml><?xml version="1.0" encoding="utf-8"?>
 <p1510:revInfo xmlns:a="http://schemas.openxmlformats.org/drawingml/2006/main" xmlns:r="http://schemas.openxmlformats.org/officeDocument/2006/relationships" xmlns:p1510="http://schemas.microsoft.com/office/powerpoint/2015/10/main">
   <p1510:revLst>
-    <p1510:client id="{87FA48F3-3F34-4258-A2BE-7AB2F925F76C}" v="1" dt="2026-09-14T14:04:20.005"/>
+    <p1510:client id="{87FA48F3-3F34-4258-A2BE-7AB2F925F76C}" v="2" dt="2026-09-16T18:46:59.600"/>
   </p1510:revLst>
 </p1510:revInfo>
 </file>
@@ -212,7 +213,7 @@
   <pc:docChgLst>
     <pc:chgData name="Aleksey Zimin" userId="7f2637d0bc515791" providerId="LiveId" clId="{5F359FD6-B8E9-41DA-90EC-0BA4FD0F3073}"/>
     <pc:docChg chg="undo custSel addSld delSld modSld">
-      <pc:chgData name="Aleksey Zimin" userId="7f2637d0bc515791" providerId="LiveId" clId="{5F359FD6-B8E9-41DA-90EC-0BA4FD0F3073}" dt="2026-09-14T14:11:16.268" v="592" actId="20577"/>
+      <pc:chgData name="Aleksey Zimin" userId="7f2637d0bc515791" providerId="LiveId" clId="{5F359FD6-B8E9-41DA-90EC-0BA4FD0F3073}" dt="2026-09-16T18:47:23.810" v="763" actId="1076"/>
       <pc:docMkLst>
         <pc:docMk/>
       </pc:docMkLst>
@@ -280,7 +281,7 @@
         </pc:sldMkLst>
       </pc:sldChg>
       <pc:sldChg chg="modSp mod">
-        <pc:chgData name="Aleksey Zimin" userId="7f2637d0bc515791" providerId="LiveId" clId="{5F359FD6-B8E9-41DA-90EC-0BA4FD0F3073}" dt="2026-09-14T14:11:16.268" v="592" actId="20577"/>
+        <pc:chgData name="Aleksey Zimin" userId="7f2637d0bc515791" providerId="LiveId" clId="{5F359FD6-B8E9-41DA-90EC-0BA4FD0F3073}" dt="2026-09-14T18:37:40.722" v="642" actId="20577"/>
         <pc:sldMkLst>
           <pc:docMk/>
           <pc:sldMk cId="665784781" sldId="527"/>
@@ -294,13 +295,90 @@
           </ac:spMkLst>
         </pc:spChg>
         <pc:spChg chg="mod">
-          <ac:chgData name="Aleksey Zimin" userId="7f2637d0bc515791" providerId="LiveId" clId="{5F359FD6-B8E9-41DA-90EC-0BA4FD0F3073}" dt="2026-09-14T14:10:01.259" v="590" actId="114"/>
+          <ac:chgData name="Aleksey Zimin" userId="7f2637d0bc515791" providerId="LiveId" clId="{5F359FD6-B8E9-41DA-90EC-0BA4FD0F3073}" dt="2026-09-14T18:37:40.722" v="642" actId="20577"/>
           <ac:spMkLst>
             <pc:docMk/>
             <pc:sldMk cId="665784781" sldId="527"/>
             <ac:spMk id="3" creationId="{D99A5D06-87D4-1599-AC41-7C811E5AE247}"/>
           </ac:spMkLst>
         </pc:spChg>
+      </pc:sldChg>
+      <pc:sldChg chg="delSp modSp mod">
+        <pc:chgData name="Aleksey Zimin" userId="7f2637d0bc515791" providerId="LiveId" clId="{5F359FD6-B8E9-41DA-90EC-0BA4FD0F3073}" dt="2026-09-16T18:10:33.096" v="646" actId="478"/>
+        <pc:sldMkLst>
+          <pc:docMk/>
+          <pc:sldMk cId="1637561640" sldId="574"/>
+        </pc:sldMkLst>
+        <pc:cxnChg chg="del mod">
+          <ac:chgData name="Aleksey Zimin" userId="7f2637d0bc515791" providerId="LiveId" clId="{5F359FD6-B8E9-41DA-90EC-0BA4FD0F3073}" dt="2026-09-16T18:10:32.025" v="645" actId="478"/>
+          <ac:cxnSpMkLst>
+            <pc:docMk/>
+            <pc:sldMk cId="1637561640" sldId="574"/>
+            <ac:cxnSpMk id="7" creationId="{118F5D7C-5221-C420-FB36-754E3ABB9EA0}"/>
+          </ac:cxnSpMkLst>
+        </pc:cxnChg>
+        <pc:cxnChg chg="del mod">
+          <ac:chgData name="Aleksey Zimin" userId="7f2637d0bc515791" providerId="LiveId" clId="{5F359FD6-B8E9-41DA-90EC-0BA4FD0F3073}" dt="2026-09-16T18:10:33.096" v="646" actId="478"/>
+          <ac:cxnSpMkLst>
+            <pc:docMk/>
+            <pc:sldMk cId="1637561640" sldId="574"/>
+            <ac:cxnSpMk id="8" creationId="{8D07E13E-7CC5-1E63-047C-C75E089E922B}"/>
+          </ac:cxnSpMkLst>
+        </pc:cxnChg>
+      </pc:sldChg>
+      <pc:sldChg chg="modSp mod">
+        <pc:chgData name="Aleksey Zimin" userId="7f2637d0bc515791" providerId="LiveId" clId="{5F359FD6-B8E9-41DA-90EC-0BA4FD0F3073}" dt="2026-09-16T18:39:00.519" v="752" actId="1076"/>
+        <pc:sldMkLst>
+          <pc:docMk/>
+          <pc:sldMk cId="1253169231" sldId="581"/>
+        </pc:sldMkLst>
+        <pc:spChg chg="mod">
+          <ac:chgData name="Aleksey Zimin" userId="7f2637d0bc515791" providerId="LiveId" clId="{5F359FD6-B8E9-41DA-90EC-0BA4FD0F3073}" dt="2026-09-16T18:39:00.519" v="752" actId="1076"/>
+          <ac:spMkLst>
+            <pc:docMk/>
+            <pc:sldMk cId="1253169231" sldId="581"/>
+            <ac:spMk id="11" creationId="{AF497A88-975D-04FD-325F-BB6DCAD36E0C}"/>
+          </ac:spMkLst>
+        </pc:spChg>
+      </pc:sldChg>
+      <pc:sldChg chg="addSp delSp modSp add mod">
+        <pc:chgData name="Aleksey Zimin" userId="7f2637d0bc515791" providerId="LiveId" clId="{5F359FD6-B8E9-41DA-90EC-0BA4FD0F3073}" dt="2026-09-16T18:47:23.810" v="763" actId="1076"/>
+        <pc:sldMkLst>
+          <pc:docMk/>
+          <pc:sldMk cId="678657169" sldId="611"/>
+        </pc:sldMkLst>
+        <pc:spChg chg="add del mod">
+          <ac:chgData name="Aleksey Zimin" userId="7f2637d0bc515791" providerId="LiveId" clId="{5F359FD6-B8E9-41DA-90EC-0BA4FD0F3073}" dt="2026-09-16T18:46:33.026" v="755" actId="478"/>
+          <ac:spMkLst>
+            <pc:docMk/>
+            <pc:sldMk cId="678657169" sldId="611"/>
+            <ac:spMk id="4" creationId="{C40AADA6-D0C8-4764-FA21-9D4F2866868C}"/>
+          </ac:spMkLst>
+        </pc:spChg>
+        <pc:spChg chg="add mod">
+          <ac:chgData name="Aleksey Zimin" userId="7f2637d0bc515791" providerId="LiveId" clId="{5F359FD6-B8E9-41DA-90EC-0BA4FD0F3073}" dt="2026-09-16T18:47:19.495" v="762" actId="1076"/>
+          <ac:spMkLst>
+            <pc:docMk/>
+            <pc:sldMk cId="678657169" sldId="611"/>
+            <ac:spMk id="7" creationId="{DFAEE5DB-844A-518B-4ADA-7E092D586532}"/>
+          </ac:spMkLst>
+        </pc:spChg>
+        <pc:spChg chg="del">
+          <ac:chgData name="Aleksey Zimin" userId="7f2637d0bc515791" providerId="LiveId" clId="{5F359FD6-B8E9-41DA-90EC-0BA4FD0F3073}" dt="2026-09-16T18:46:30.607" v="754" actId="478"/>
+          <ac:spMkLst>
+            <pc:docMk/>
+            <pc:sldMk cId="678657169" sldId="611"/>
+            <ac:spMk id="11" creationId="{CFD97BA8-1602-5AE1-52D1-39DDAFF69DF9}"/>
+          </ac:spMkLst>
+        </pc:spChg>
+        <pc:picChg chg="add mod">
+          <ac:chgData name="Aleksey Zimin" userId="7f2637d0bc515791" providerId="LiveId" clId="{5F359FD6-B8E9-41DA-90EC-0BA4FD0F3073}" dt="2026-09-16T18:47:23.810" v="763" actId="1076"/>
+          <ac:picMkLst>
+            <pc:docMk/>
+            <pc:sldMk cId="678657169" sldId="611"/>
+            <ac:picMk id="6" creationId="{03B23FCD-A59D-A0D0-86B7-1E008901EAB8}"/>
+          </ac:picMkLst>
+        </pc:picChg>
       </pc:sldChg>
     </pc:docChg>
   </pc:docChgLst>
@@ -389,7 +467,7 @@
           <a:p>
             <a:fld id="{78C61B90-1233-4265-A8E1-4CB85DE126FB}" type="datetimeFigureOut">
               <a:rPr lang="en-US" smtClean="0"/>
-              <a:t>9/14/2026</a:t>
+              <a:t>9/16/2026</a:t>
             </a:fld>
             <a:endParaRPr lang="en-US"/>
           </a:p>
@@ -951,7 +1029,7 @@
           <a:p>
             <a:fld id="{E2773EFF-6084-460D-96FA-2FA787A98816}" type="datetime1">
               <a:rPr lang="en-US" smtClean="0"/>
-              <a:t>9/14/2026</a:t>
+              <a:t>9/16/2026</a:t>
             </a:fld>
             <a:endParaRPr lang="en-US"/>
           </a:p>
@@ -1204,7 +1282,7 @@
           <a:p>
             <a:fld id="{013692F8-B2BD-4E07-9A92-E5080B238DFA}" type="datetime1">
               <a:rPr lang="en-US" smtClean="0"/>
-              <a:t>9/14/2026</a:t>
+              <a:t>9/16/2026</a:t>
             </a:fld>
             <a:endParaRPr lang="en-US"/>
           </a:p>
@@ -1373,7 +1451,7 @@
           <a:p>
             <a:fld id="{82A88673-6F42-4090-A040-176AF0E6DEAE}" type="datetime1">
               <a:rPr lang="en-US" smtClean="0"/>
-              <a:t>9/14/2026</a:t>
+              <a:t>9/16/2026</a:t>
             </a:fld>
             <a:endParaRPr lang="en-US"/>
           </a:p>
@@ -1552,7 +1630,7 @@
           <a:p>
             <a:fld id="{EC715288-B7FB-4510-97B0-C840A6671DDD}" type="datetime1">
               <a:rPr lang="en-US" smtClean="0"/>
-              <a:t>9/14/2026</a:t>
+              <a:t>9/16/2026</a:t>
             </a:fld>
             <a:endParaRPr lang="en-US"/>
           </a:p>
@@ -2213,7 +2291,7 @@
           <a:p>
             <a:fld id="{93FF86A1-0F17-41D8-9FFA-9520AF33BFC6}" type="datetime1">
               <a:rPr lang="en-US" smtClean="0"/>
-              <a:t>9/14/2026</a:t>
+              <a:t>9/16/2026</a:t>
             </a:fld>
             <a:endParaRPr lang="en-US"/>
           </a:p>
@@ -2448,7 +2526,7 @@
           <a:p>
             <a:fld id="{E41692F4-087A-4F4C-9829-F340F0646973}" type="datetime1">
               <a:rPr lang="en-US" smtClean="0"/>
-              <a:t>9/14/2026</a:t>
+              <a:t>9/16/2026</a:t>
             </a:fld>
             <a:endParaRPr lang="en-US"/>
           </a:p>
@@ -2694,7 +2772,7 @@
           <a:p>
             <a:fld id="{93E80BFE-E826-4B70-BF6B-3710B05194AF}" type="datetime1">
               <a:rPr lang="en-US" smtClean="0"/>
-              <a:t>9/14/2026</a:t>
+              <a:t>9/16/2026</a:t>
             </a:fld>
             <a:endParaRPr lang="en-US"/>
           </a:p>
@@ -2980,7 +3058,7 @@
           <a:p>
             <a:fld id="{9C5182DA-5425-42F9-BDB8-0DBDA15B981E}" type="datetime1">
               <a:rPr lang="en-US" smtClean="0"/>
-              <a:t>9/14/2026</a:t>
+              <a:t>9/16/2026</a:t>
             </a:fld>
             <a:endParaRPr lang="en-US"/>
           </a:p>
@@ -3479,7 +3557,7 @@
           <a:p>
             <a:fld id="{131B7164-C7F7-495E-9D5F-43BBDEBECF81}" type="datetime1">
               <a:rPr lang="en-US" smtClean="0"/>
-              <a:t>9/14/2026</a:t>
+              <a:t>9/16/2026</a:t>
             </a:fld>
             <a:endParaRPr lang="en-US"/>
           </a:p>
@@ -3597,7 +3675,7 @@
           <a:p>
             <a:fld id="{2D6C5AB8-78AA-4DA3-952F-F5057D2DAAA5}" type="datetime1">
               <a:rPr lang="en-US" smtClean="0"/>
-              <a:t>9/14/2026</a:t>
+              <a:t>9/16/2026</a:t>
             </a:fld>
             <a:endParaRPr lang="en-US"/>
           </a:p>
@@ -3693,7 +3771,7 @@
           <a:p>
             <a:fld id="{41CCB869-D2D8-4282-A525-D63712C1B900}" type="datetime1">
               <a:rPr lang="en-US" smtClean="0"/>
-              <a:t>9/14/2026</a:t>
+              <a:t>9/16/2026</a:t>
             </a:fld>
             <a:endParaRPr lang="en-US"/>
           </a:p>
@@ -3969,7 +4047,7 @@
           <a:p>
             <a:fld id="{25A8CF58-29B0-4D31-BE55-D9C1F05848B7}" type="datetime1">
               <a:rPr lang="en-US" smtClean="0"/>
-              <a:t>9/14/2026</a:t>
+              <a:t>9/16/2026</a:t>
             </a:fld>
             <a:endParaRPr lang="en-US"/>
           </a:p>
@@ -4190,7 +4268,7 @@
           <a:p>
             <a:fld id="{8F08395F-151A-4402-98B5-C84E535B9AEF}" type="datetime1">
               <a:rPr lang="en-US" smtClean="0"/>
-              <a:t>9/14/2026</a:t>
+              <a:t>9/16/2026</a:t>
             </a:fld>
             <a:endParaRPr lang="en-US"/>
           </a:p>
@@ -9701,7 +9779,19 @@
             </a:r>
             <a:r>
               <a:rPr lang="en-US" dirty="0"/>
-              <a:t>computes implied alignments based on minimizer positions.  Seq1 is always forward, seq2 could be forward or reverse.  Returns tuple of arrays corresponding to implied offsets between seq1 and seq2 and implied orientations (-1 or 1):</a:t>
+              <a:t>computes implied alignments based on minimizer positions.  Seq1 is always forward, seq2 could be forward or reverse.  Returns tuple of arrays corresponding to implied offsets between seq1 and seq2 and implied orientations (-1 or 1), one value </a:t>
+            </a:r>
+            <a:r>
+              <a:rPr lang="en-US"/>
+              <a:t>in each </a:t>
+            </a:r>
+            <a:r>
+              <a:rPr lang="en-US" dirty="0"/>
+              <a:t>per </a:t>
+            </a:r>
+            <a:r>
+              <a:rPr lang="en-US"/>
+              <a:t>shared minimizer:</a:t>
             </a:r>
             <a:br>
               <a:rPr lang="en-US" dirty="0"/>
@@ -16357,86 +16447,6 @@
           </a:p>
         </p:txBody>
       </p:sp>
-      <p:cxnSp>
-        <p:nvCxnSpPr>
-          <p:cNvPr id="7" name="Straight Arrow Connector 6">
-            <a:extLst>
-              <a:ext uri="{FF2B5EF4-FFF2-40B4-BE49-F238E27FC236}">
-                <a16:creationId xmlns:a16="http://schemas.microsoft.com/office/drawing/2014/main" id="{118F5D7C-5221-C420-FB36-754E3ABB9EA0}"/>
-              </a:ext>
-            </a:extLst>
-          </p:cNvPr>
-          <p:cNvCxnSpPr/>
-          <p:nvPr/>
-        </p:nvCxnSpPr>
-        <p:spPr>
-          <a:xfrm>
-            <a:off x="6411558" y="4127052"/>
-            <a:ext cx="387275" cy="0"/>
-          </a:xfrm>
-          <a:prstGeom prst="straightConnector1">
-            <a:avLst/>
-          </a:prstGeom>
-          <a:ln w="38100">
-            <a:tailEnd type="triangle"/>
-          </a:ln>
-        </p:spPr>
-        <p:style>
-          <a:lnRef idx="1">
-            <a:schemeClr val="accent2"/>
-          </a:lnRef>
-          <a:fillRef idx="0">
-            <a:schemeClr val="accent2"/>
-          </a:fillRef>
-          <a:effectRef idx="0">
-            <a:schemeClr val="accent2"/>
-          </a:effectRef>
-          <a:fontRef idx="minor">
-            <a:schemeClr val="tx1"/>
-          </a:fontRef>
-        </p:style>
-      </p:cxnSp>
-      <p:cxnSp>
-        <p:nvCxnSpPr>
-          <p:cNvPr id="8" name="Straight Arrow Connector 7">
-            <a:extLst>
-              <a:ext uri="{FF2B5EF4-FFF2-40B4-BE49-F238E27FC236}">
-                <a16:creationId xmlns:a16="http://schemas.microsoft.com/office/drawing/2014/main" id="{8D07E13E-7CC5-1E63-047C-C75E089E922B}"/>
-              </a:ext>
-            </a:extLst>
-          </p:cNvPr>
-          <p:cNvCxnSpPr>
-            <a:cxnSpLocks/>
-          </p:cNvCxnSpPr>
-          <p:nvPr/>
-        </p:nvCxnSpPr>
-        <p:spPr>
-          <a:xfrm flipH="1" flipV="1">
-            <a:off x="6411558" y="3303112"/>
-            <a:ext cx="387274" cy="823940"/>
-          </a:xfrm>
-          <a:prstGeom prst="straightConnector1">
-            <a:avLst/>
-          </a:prstGeom>
-          <a:ln w="38100">
-            <a:tailEnd type="triangle"/>
-          </a:ln>
-        </p:spPr>
-        <p:style>
-          <a:lnRef idx="1">
-            <a:schemeClr val="accent2"/>
-          </a:lnRef>
-          <a:fillRef idx="0">
-            <a:schemeClr val="accent2"/>
-          </a:fillRef>
-          <a:effectRef idx="0">
-            <a:schemeClr val="accent2"/>
-          </a:effectRef>
-          <a:fontRef idx="minor">
-            <a:schemeClr val="tx1"/>
-          </a:fontRef>
-        </p:style>
-      </p:cxnSp>
       <p:cxnSp>
         <p:nvCxnSpPr>
           <p:cNvPr id="11" name="Straight Arrow Connector 10">
@@ -20532,12 +20542,14 @@
         </p:nvSpPr>
         <p:spPr>
           <a:xfrm>
-            <a:off x="598620" y="1596540"/>
-            <a:ext cx="5351606" cy="5261460"/>
+            <a:off x="128229" y="1596540"/>
+            <a:ext cx="5888678" cy="5261460"/>
           </a:xfrm>
         </p:spPr>
         <p:txBody>
-          <a:bodyPr/>
+          <a:bodyPr>
+            <a:normAutofit lnSpcReduction="10000"/>
+          </a:bodyPr>
           <a:lstStyle/>
           <a:p>
             <a:r>
@@ -20611,6 +20623,29 @@
             <a:r>
               <a:rPr lang="en-US" dirty="0"/>
               <a:t>) </a:t>
+            </a:r>
+          </a:p>
+          <a:p>
+            <a:endParaRPr lang="en-US" dirty="0"/>
+          </a:p>
+          <a:p>
+            <a:r>
+              <a:rPr lang="en-US" dirty="0"/>
+              <a:t>Remember:</a:t>
+            </a:r>
+          </a:p>
+          <a:p>
+            <a:pPr lvl="1"/>
+            <a:r>
+              <a:rPr lang="en-US" dirty="0"/>
+              <a:t>DNA sequence -&gt; Protein: unique</a:t>
+            </a:r>
+          </a:p>
+          <a:p>
+            <a:pPr lvl="1"/>
+            <a:r>
+              <a:rPr lang="en-US" dirty="0"/>
+              <a:t>Protein -x-&gt; DNA sequence: not unique</a:t>
             </a:r>
           </a:p>
           <a:p>
@@ -20635,6 +20670,174 @@
 </file>
 
 <file path=ppt/slides/slide44.xml><?xml version="1.0" encoding="utf-8"?>
+<p:sld xmlns:a="http://schemas.openxmlformats.org/drawingml/2006/main" xmlns:r="http://schemas.openxmlformats.org/officeDocument/2006/relationships" xmlns:p="http://schemas.openxmlformats.org/presentationml/2006/main">
+  <p:cSld>
+    <p:spTree>
+      <p:nvGrpSpPr>
+        <p:cNvPr id="1" name="">
+          <a:extLst>
+            <a:ext uri="{FF2B5EF4-FFF2-40B4-BE49-F238E27FC236}">
+              <a16:creationId xmlns:a16="http://schemas.microsoft.com/office/drawing/2014/main" id="{3F26015D-779A-5530-D8BC-60E6FB731CD3}"/>
+            </a:ext>
+          </a:extLst>
+        </p:cNvPr>
+        <p:cNvGrpSpPr/>
+        <p:nvPr/>
+      </p:nvGrpSpPr>
+      <p:grpSpPr>
+        <a:xfrm>
+          <a:off x="0" y="0"/>
+          <a:ext cx="0" cy="0"/>
+          <a:chOff x="0" y="0"/>
+          <a:chExt cx="0" cy="0"/>
+        </a:xfrm>
+      </p:grpSpPr>
+      <p:sp>
+        <p:nvSpPr>
+          <p:cNvPr id="2" name="Title 1">
+            <a:extLst>
+              <a:ext uri="{FF2B5EF4-FFF2-40B4-BE49-F238E27FC236}">
+                <a16:creationId xmlns:a16="http://schemas.microsoft.com/office/drawing/2014/main" id="{44731579-19DA-0E22-5D31-8BF0D105FD05}"/>
+              </a:ext>
+            </a:extLst>
+          </p:cNvPr>
+          <p:cNvSpPr>
+            <a:spLocks noGrp="1"/>
+          </p:cNvSpPr>
+          <p:nvPr>
+            <p:ph type="title"/>
+          </p:nvPr>
+        </p:nvSpPr>
+        <p:spPr/>
+        <p:txBody>
+          <a:bodyPr>
+            <a:normAutofit fontScale="90000"/>
+          </a:bodyPr>
+          <a:lstStyle/>
+          <a:p>
+            <a:r>
+              <a:rPr lang="en-US" dirty="0"/>
+              <a:t>NCBI Blast online</a:t>
+            </a:r>
+          </a:p>
+        </p:txBody>
+      </p:sp>
+      <p:pic>
+        <p:nvPicPr>
+          <p:cNvPr id="10" name="Picture 9">
+            <a:extLst>
+              <a:ext uri="{FF2B5EF4-FFF2-40B4-BE49-F238E27FC236}">
+                <a16:creationId xmlns:a16="http://schemas.microsoft.com/office/drawing/2014/main" id="{59067CE5-C4E0-F916-BAD0-606EE0C535D4}"/>
+              </a:ext>
+            </a:extLst>
+          </p:cNvPr>
+          <p:cNvPicPr>
+            <a:picLocks noChangeAspect="1"/>
+          </p:cNvPicPr>
+          <p:nvPr/>
+        </p:nvPicPr>
+        <p:blipFill>
+          <a:blip r:embed="rId2"/>
+          <a:stretch>
+            <a:fillRect/>
+          </a:stretch>
+        </p:blipFill>
+        <p:spPr>
+          <a:xfrm>
+            <a:off x="6096000" y="0"/>
+            <a:ext cx="5991118" cy="6858000"/>
+          </a:xfrm>
+          <a:prstGeom prst="rect">
+            <a:avLst/>
+          </a:prstGeom>
+        </p:spPr>
+      </p:pic>
+      <p:pic>
+        <p:nvPicPr>
+          <p:cNvPr id="6" name="Graphic 5">
+            <a:extLst>
+              <a:ext uri="{FF2B5EF4-FFF2-40B4-BE49-F238E27FC236}">
+                <a16:creationId xmlns:a16="http://schemas.microsoft.com/office/drawing/2014/main" id="{03B23FCD-A59D-A0D0-86B7-1E008901EAB8}"/>
+              </a:ext>
+            </a:extLst>
+          </p:cNvPr>
+          <p:cNvPicPr>
+            <a:picLocks noChangeAspect="1"/>
+          </p:cNvPicPr>
+          <p:nvPr/>
+        </p:nvPicPr>
+        <p:blipFill>
+          <a:blip>
+            <a:extLst>
+              <a:ext uri="{96DAC541-7B7A-43D3-8B79-37D633B846F1}">
+                <asvg:svgBlip xmlns:asvg="http://schemas.microsoft.com/office/drawing/2016/SVG/main" r:embed="rId3"/>
+              </a:ext>
+            </a:extLst>
+          </a:blip>
+          <a:stretch>
+            <a:fillRect/>
+          </a:stretch>
+        </p:blipFill>
+        <p:spPr>
+          <a:xfrm>
+            <a:off x="211141" y="1138425"/>
+            <a:ext cx="5369161" cy="5286559"/>
+          </a:xfrm>
+          <a:prstGeom prst="rect">
+            <a:avLst/>
+          </a:prstGeom>
+        </p:spPr>
+      </p:pic>
+      <p:sp>
+        <p:nvSpPr>
+          <p:cNvPr id="7" name="TextBox 6">
+            <a:extLst>
+              <a:ext uri="{FF2B5EF4-FFF2-40B4-BE49-F238E27FC236}">
+                <a16:creationId xmlns:a16="http://schemas.microsoft.com/office/drawing/2014/main" id="{DFAEE5DB-844A-518B-4ADA-7E092D586532}"/>
+              </a:ext>
+            </a:extLst>
+          </p:cNvPr>
+          <p:cNvSpPr txBox="1"/>
+          <p:nvPr/>
+        </p:nvSpPr>
+        <p:spPr>
+          <a:xfrm>
+            <a:off x="104882" y="6287103"/>
+            <a:ext cx="7512908" cy="646331"/>
+          </a:xfrm>
+          <a:prstGeom prst="rect">
+            <a:avLst/>
+          </a:prstGeom>
+          <a:noFill/>
+        </p:spPr>
+        <p:txBody>
+          <a:bodyPr wrap="square" rtlCol="0">
+            <a:spAutoFit/>
+          </a:bodyPr>
+          <a:lstStyle/>
+          <a:p>
+            <a:r>
+              <a:rPr lang="en-US"/>
+              <a:t>By Mouagip - Codons aminoacids table.png, Public Domain, https://commons.wikimedia.org/w/index.php?curid=5986132</a:t>
+            </a:r>
+            <a:endParaRPr lang="en-US" dirty="0"/>
+          </a:p>
+        </p:txBody>
+      </p:sp>
+    </p:spTree>
+    <p:extLst>
+      <p:ext uri="{BB962C8B-B14F-4D97-AF65-F5344CB8AC3E}">
+        <p14:creationId xmlns:p14="http://schemas.microsoft.com/office/powerpoint/2010/main" val="678657169"/>
+      </p:ext>
+    </p:extLst>
+  </p:cSld>
+  <p:clrMapOvr>
+    <a:masterClrMapping/>
+  </p:clrMapOvr>
+</p:sld>
+</file>
+
+<file path=ppt/slides/slide45.xml><?xml version="1.0" encoding="utf-8"?>
 <p:sld xmlns:a="http://schemas.openxmlformats.org/drawingml/2006/main" xmlns:r="http://schemas.openxmlformats.org/officeDocument/2006/relationships" xmlns:p="http://schemas.openxmlformats.org/presentationml/2006/main">
   <p:cSld>
     <p:spTree>
@@ -20730,7 +20933,7 @@
 </p:sld>
 </file>
 
-<file path=ppt/slides/slide45.xml><?xml version="1.0" encoding="utf-8"?>
+<file path=ppt/slides/slide46.xml><?xml version="1.0" encoding="utf-8"?>
 <p:sld xmlns:a="http://schemas.openxmlformats.org/drawingml/2006/main" xmlns:r="http://schemas.openxmlformats.org/officeDocument/2006/relationships" xmlns:p="http://schemas.openxmlformats.org/presentationml/2006/main">
   <p:cSld>
     <p:spTree>
@@ -20826,7 +21029,7 @@
 </p:sld>
 </file>
 
-<file path=ppt/slides/slide46.xml><?xml version="1.0" encoding="utf-8"?>
+<file path=ppt/slides/slide47.xml><?xml version="1.0" encoding="utf-8"?>
 <p:sld xmlns:a="http://schemas.openxmlformats.org/drawingml/2006/main" xmlns:r="http://schemas.openxmlformats.org/officeDocument/2006/relationships" xmlns:p="http://schemas.openxmlformats.org/presentationml/2006/main">
   <p:cSld>
     <p:spTree>
@@ -20922,7 +21125,7 @@
 </p:sld>
 </file>
 
-<file path=ppt/slides/slide47.xml><?xml version="1.0" encoding="utf-8"?>
+<file path=ppt/slides/slide48.xml><?xml version="1.0" encoding="utf-8"?>
 <p:sld xmlns:a="http://schemas.openxmlformats.org/drawingml/2006/main" xmlns:r="http://schemas.openxmlformats.org/officeDocument/2006/relationships" xmlns:p="http://schemas.openxmlformats.org/presentationml/2006/main">
   <p:cSld>
     <p:spTree>
@@ -21248,146 +21451,6 @@
 </p:sld>
 </file>
 
-<file path=ppt/slides/slide48.xml><?xml version="1.0" encoding="utf-8"?>
-<p:sld xmlns:a="http://schemas.openxmlformats.org/drawingml/2006/main" xmlns:r="http://schemas.openxmlformats.org/officeDocument/2006/relationships" xmlns:p="http://schemas.openxmlformats.org/presentationml/2006/main">
-  <p:cSld>
-    <p:spTree>
-      <p:nvGrpSpPr>
-        <p:cNvPr id="1" name=""/>
-        <p:cNvGrpSpPr/>
-        <p:nvPr/>
-      </p:nvGrpSpPr>
-      <p:grpSpPr>
-        <a:xfrm>
-          <a:off x="0" y="0"/>
-          <a:ext cx="0" cy="0"/>
-          <a:chOff x="0" y="0"/>
-          <a:chExt cx="0" cy="0"/>
-        </a:xfrm>
-      </p:grpSpPr>
-      <p:sp>
-        <p:nvSpPr>
-          <p:cNvPr id="2" name="Title 1">
-            <a:extLst>
-              <a:ext uri="{FF2B5EF4-FFF2-40B4-BE49-F238E27FC236}">
-                <a16:creationId xmlns:a16="http://schemas.microsoft.com/office/drawing/2014/main" id="{6954DF62-1EBB-683B-DAEF-0D19D7D604F0}"/>
-              </a:ext>
-            </a:extLst>
-          </p:cNvPr>
-          <p:cNvSpPr>
-            <a:spLocks noGrp="1"/>
-          </p:cNvSpPr>
-          <p:nvPr>
-            <p:ph type="title"/>
-          </p:nvPr>
-        </p:nvSpPr>
-        <p:spPr/>
-        <p:txBody>
-          <a:bodyPr>
-            <a:normAutofit fontScale="90000"/>
-          </a:bodyPr>
-          <a:lstStyle/>
-          <a:p>
-            <a:r>
-              <a:rPr lang="en-US" dirty="0"/>
-              <a:t>Nucmer aligner</a:t>
-            </a:r>
-          </a:p>
-        </p:txBody>
-      </p:sp>
-      <p:sp>
-        <p:nvSpPr>
-          <p:cNvPr id="3" name="Content Placeholder 2">
-            <a:extLst>
-              <a:ext uri="{FF2B5EF4-FFF2-40B4-BE49-F238E27FC236}">
-                <a16:creationId xmlns:a16="http://schemas.microsoft.com/office/drawing/2014/main" id="{829BA9CD-2273-4C42-BBB1-119F4DD852D1}"/>
-              </a:ext>
-            </a:extLst>
-          </p:cNvPr>
-          <p:cNvSpPr>
-            <a:spLocks noGrp="1"/>
-          </p:cNvSpPr>
-          <p:nvPr>
-            <p:ph idx="1"/>
-          </p:nvPr>
-        </p:nvSpPr>
-        <p:spPr>
-          <a:xfrm>
-            <a:off x="445915" y="1901950"/>
-            <a:ext cx="10972800" cy="4275740"/>
-          </a:xfrm>
-        </p:spPr>
-        <p:txBody>
-          <a:bodyPr>
-            <a:normAutofit lnSpcReduction="10000"/>
-          </a:bodyPr>
-          <a:lstStyle/>
-          <a:p>
-            <a:r>
-              <a:rPr lang="en-US" i="1" dirty="0"/>
-              <a:t>nucmer</a:t>
-            </a:r>
-            <a:r>
-              <a:rPr lang="en-US" dirty="0"/>
-              <a:t> is a general alignment tool for aligning DNA sequences</a:t>
-            </a:r>
-          </a:p>
-          <a:p>
-            <a:pPr lvl="1"/>
-            <a:r>
-              <a:rPr lang="en-US" dirty="0"/>
-              <a:t>documentation </a:t>
-            </a:r>
-            <a:r>
-              <a:rPr lang="en-US" dirty="0">
-                <a:hlinkClick r:id="rId2"/>
-              </a:rPr>
-              <a:t>https://mummer4.github.io/</a:t>
-            </a:r>
-            <a:endParaRPr lang="en-US" dirty="0"/>
-          </a:p>
-          <a:p>
-            <a:endParaRPr lang="en-US" dirty="0"/>
-          </a:p>
-          <a:p>
-            <a:r>
-              <a:rPr lang="en-US" dirty="0"/>
-              <a:t>fast, multi-threaded</a:t>
-            </a:r>
-          </a:p>
-          <a:p>
-            <a:endParaRPr lang="en-US" dirty="0"/>
-          </a:p>
-          <a:p>
-            <a:r>
-              <a:rPr lang="en-US" dirty="0"/>
-              <a:t>virtually no limitation on sequence length</a:t>
-            </a:r>
-          </a:p>
-          <a:p>
-            <a:endParaRPr lang="en-US" dirty="0"/>
-          </a:p>
-          <a:p>
-            <a:r>
-              <a:rPr lang="en-US" dirty="0"/>
-              <a:t>based on seeding the alignment with maximal exact matches (MUMs) and suffix arrays</a:t>
-            </a:r>
-          </a:p>
-        </p:txBody>
-      </p:sp>
-    </p:spTree>
-    <p:extLst>
-      <p:ext uri="{BB962C8B-B14F-4D97-AF65-F5344CB8AC3E}">
-        <p14:creationId xmlns:p14="http://schemas.microsoft.com/office/powerpoint/2010/main" val="893523474"/>
-      </p:ext>
-    </p:extLst>
-  </p:cSld>
-  <p:clrMapOvr>
-    <a:masterClrMapping/>
-  </p:clrMapOvr>
-</p:sld>
-</file>
-
 <file path=ppt/slides/slide49.xml><?xml version="1.0" encoding="utf-8"?>
 <p:sld xmlns:a="http://schemas.openxmlformats.org/drawingml/2006/main" xmlns:r="http://schemas.openxmlformats.org/officeDocument/2006/relationships" xmlns:p="http://schemas.openxmlformats.org/presentationml/2006/main">
   <p:cSld>
@@ -21410,7 +21473,7 @@
           <p:cNvPr id="2" name="Title 1">
             <a:extLst>
               <a:ext uri="{FF2B5EF4-FFF2-40B4-BE49-F238E27FC236}">
-                <a16:creationId xmlns:a16="http://schemas.microsoft.com/office/drawing/2014/main" id="{4DEE0113-704B-B073-8469-8EBF0CA4839B}"/>
+                <a16:creationId xmlns:a16="http://schemas.microsoft.com/office/drawing/2014/main" id="{6954DF62-1EBB-683B-DAEF-0D19D7D604F0}"/>
               </a:ext>
             </a:extLst>
           </p:cNvPr>
@@ -21430,7 +21493,7 @@
           <a:p>
             <a:r>
               <a:rPr lang="en-US" dirty="0"/>
-              <a:t>Nucmer usage</a:t>
+              <a:t>Nucmer aligner</a:t>
             </a:r>
           </a:p>
         </p:txBody>
@@ -21440,7 +21503,7 @@
           <p:cNvPr id="3" name="Content Placeholder 2">
             <a:extLst>
               <a:ext uri="{FF2B5EF4-FFF2-40B4-BE49-F238E27FC236}">
-                <a16:creationId xmlns:a16="http://schemas.microsoft.com/office/drawing/2014/main" id="{791788F4-FF21-B46E-6352-C2620D8ED97A}"/>
+                <a16:creationId xmlns:a16="http://schemas.microsoft.com/office/drawing/2014/main" id="{829BA9CD-2273-4C42-BBB1-119F4DD852D1}"/>
               </a:ext>
             </a:extLst>
           </p:cNvPr>
@@ -21453,31 +21516,36 @@
         </p:nvSpPr>
         <p:spPr>
           <a:xfrm>
-            <a:off x="609600" y="1901950"/>
-            <a:ext cx="10972800" cy="4581150"/>
+            <a:off x="445915" y="1901950"/>
+            <a:ext cx="10972800" cy="4275740"/>
           </a:xfrm>
         </p:spPr>
         <p:txBody>
           <a:bodyPr>
-            <a:normAutofit fontScale="92500" lnSpcReduction="10000"/>
+            <a:normAutofit lnSpcReduction="10000"/>
           </a:bodyPr>
           <a:lstStyle/>
           <a:p>
             <a:r>
-              <a:rPr lang="en-US" dirty="0"/>
-              <a:t>nucmer –t &lt;# threads&gt; -p &lt;prefix&gt; </a:t>
-            </a:r>
-            <a:r>
-              <a:rPr lang="en-US" dirty="0" err="1"/>
-              <a:t>reference.fa</a:t>
-            </a:r>
-            <a:r>
-              <a:rPr lang="en-US" dirty="0"/>
-              <a:t> </a:t>
-            </a:r>
-            <a:r>
-              <a:rPr lang="en-US" dirty="0" err="1"/>
-              <a:t>query.fa</a:t>
+              <a:rPr lang="en-US" i="1" dirty="0"/>
+              <a:t>nucmer</a:t>
+            </a:r>
+            <a:r>
+              <a:rPr lang="en-US" dirty="0"/>
+              <a:t> is a general alignment tool for aligning DNA sequences</a:t>
+            </a:r>
+          </a:p>
+          <a:p>
+            <a:pPr lvl="1"/>
+            <a:r>
+              <a:rPr lang="en-US" dirty="0"/>
+              <a:t>documentation </a:t>
+            </a:r>
+            <a:r>
+              <a:rPr lang="en-US" dirty="0">
+                <a:hlinkClick r:id="rId2"/>
+              </a:rPr>
+              <a:t>https://mummer4.github.io/</a:t>
             </a:r>
             <a:endParaRPr lang="en-US" dirty="0"/>
           </a:p>
@@ -21487,15 +21555,7 @@
           <a:p>
             <a:r>
               <a:rPr lang="en-US" dirty="0"/>
-              <a:t>output is in </a:t>
-            </a:r>
-            <a:r>
-              <a:rPr lang="en-US" dirty="0" err="1"/>
-              <a:t>prefix.delta</a:t>
-            </a:r>
-            <a:r>
-              <a:rPr lang="en-US" dirty="0"/>
-              <a:t> (can also output SAM format)</a:t>
+              <a:t>fast, multi-threaded</a:t>
             </a:r>
           </a:p>
           <a:p>
@@ -21504,7 +21564,7 @@
           <a:p>
             <a:r>
               <a:rPr lang="en-US" dirty="0"/>
-              <a:t>by default only uses seeds (MEMs or MUMs) that are unique in the reference!</a:t>
+              <a:t>virtually no limitation on sequence length</a:t>
             </a:r>
           </a:p>
           <a:p>
@@ -21513,28 +21573,7 @@
           <a:p>
             <a:r>
               <a:rPr lang="en-US" dirty="0"/>
-              <a:t>Most useful options</a:t>
-            </a:r>
-          </a:p>
-          <a:p>
-            <a:pPr lvl="1"/>
-            <a:r>
-              <a:rPr lang="en-US" dirty="0"/>
-              <a:t>-l minimum match length</a:t>
-            </a:r>
-          </a:p>
-          <a:p>
-            <a:pPr lvl="1"/>
-            <a:r>
-              <a:rPr lang="en-US" dirty="0"/>
-              <a:t>-c minimum length of cluster of exact matches</a:t>
-            </a:r>
-          </a:p>
-          <a:p>
-            <a:pPr lvl="1"/>
-            <a:r>
-              <a:rPr lang="en-US" dirty="0"/>
-              <a:t>--batch load reference in batches</a:t>
+              <a:t>based on seeding the alignment with maximal exact matches (MUMs) and suffix arrays</a:t>
             </a:r>
           </a:p>
         </p:txBody>
@@ -21542,7 +21581,7 @@
     </p:spTree>
     <p:extLst>
       <p:ext uri="{BB962C8B-B14F-4D97-AF65-F5344CB8AC3E}">
-        <p14:creationId xmlns:p14="http://schemas.microsoft.com/office/powerpoint/2010/main" val="2875146467"/>
+        <p14:creationId xmlns:p14="http://schemas.microsoft.com/office/powerpoint/2010/main" val="893523474"/>
       </p:ext>
     </p:extLst>
   </p:cSld>
@@ -21987,7 +22026,7 @@
           <p:cNvPr id="2" name="Title 1">
             <a:extLst>
               <a:ext uri="{FF2B5EF4-FFF2-40B4-BE49-F238E27FC236}">
-                <a16:creationId xmlns:a16="http://schemas.microsoft.com/office/drawing/2014/main" id="{5736CCE2-B205-1086-C6A7-8F483B1FB722}"/>
+                <a16:creationId xmlns:a16="http://schemas.microsoft.com/office/drawing/2014/main" id="{4DEE0113-704B-B073-8469-8EBF0CA4839B}"/>
               </a:ext>
             </a:extLst>
           </p:cNvPr>
@@ -22007,7 +22046,7 @@
           <a:p>
             <a:r>
               <a:rPr lang="en-US" dirty="0"/>
-              <a:t>Filtering/viewing nucmer output</a:t>
+              <a:t>Nucmer usage</a:t>
             </a:r>
           </a:p>
         </p:txBody>
@@ -22017,7 +22056,7 @@
           <p:cNvPr id="3" name="Content Placeholder 2">
             <a:extLst>
               <a:ext uri="{FF2B5EF4-FFF2-40B4-BE49-F238E27FC236}">
-                <a16:creationId xmlns:a16="http://schemas.microsoft.com/office/drawing/2014/main" id="{D9C3B65E-5593-A906-FF37-FB8A5B95E3BA}"/>
+                <a16:creationId xmlns:a16="http://schemas.microsoft.com/office/drawing/2014/main" id="{791788F4-FF21-B46E-6352-C2620D8ED97A}"/>
               </a:ext>
             </a:extLst>
           </p:cNvPr>
@@ -22030,89 +22069,88 @@
         </p:nvSpPr>
         <p:spPr>
           <a:xfrm>
-            <a:off x="598619" y="1901950"/>
-            <a:ext cx="11147465" cy="4733855"/>
+            <a:off x="609600" y="1901950"/>
+            <a:ext cx="10972800" cy="4581150"/>
           </a:xfrm>
         </p:spPr>
         <p:txBody>
           <a:bodyPr>
-            <a:normAutofit fontScale="85000" lnSpcReduction="20000"/>
+            <a:normAutofit fontScale="92500" lnSpcReduction="10000"/>
           </a:bodyPr>
           <a:lstStyle/>
           <a:p>
             <a:r>
-              <a:rPr lang="en-US" i="1" dirty="0"/>
-              <a:t>delta-filter</a:t>
-            </a:r>
-            <a:r>
-              <a:rPr lang="en-US" dirty="0"/>
-              <a:t> tool is used to filter the output delta file</a:t>
-            </a:r>
-          </a:p>
-          <a:p>
+              <a:rPr lang="en-US" dirty="0"/>
+              <a:t>nucmer –t &lt;# threads&gt; -p &lt;prefix&gt; </a:t>
+            </a:r>
+            <a:r>
+              <a:rPr lang="en-US" dirty="0" err="1"/>
+              <a:t>reference.fa</a:t>
+            </a:r>
+            <a:r>
+              <a:rPr lang="en-US" dirty="0"/>
+              <a:t> </a:t>
+            </a:r>
+            <a:r>
+              <a:rPr lang="en-US" dirty="0" err="1"/>
+              <a:t>query.fa</a:t>
+            </a:r>
             <a:endParaRPr lang="en-US" dirty="0"/>
           </a:p>
           <a:p>
-            <a:r>
-              <a:rPr lang="en-US" i="1" dirty="0"/>
-              <a:t>show-aligns</a:t>
-            </a:r>
-            <a:r>
-              <a:rPr lang="en-US" dirty="0"/>
-              <a:t> tool is used to display individual alignments</a:t>
-            </a:r>
-          </a:p>
-          <a:p>
             <a:endParaRPr lang="en-US" dirty="0"/>
           </a:p>
           <a:p>
             <a:r>
-              <a:rPr lang="en-US" i="1" dirty="0"/>
-              <a:t>show-coords </a:t>
-            </a:r>
-            <a:r>
-              <a:rPr lang="en-US" dirty="0"/>
-              <a:t>tool is used to display the alignment coordinates in human-readable coords format</a:t>
-            </a:r>
-          </a:p>
-          <a:p>
-            <a:pPr marL="0" indent="0">
-              <a:buNone/>
-            </a:pPr>
+              <a:rPr lang="en-US" dirty="0"/>
+              <a:t>output is in </a:t>
+            </a:r>
+            <a:r>
+              <a:rPr lang="en-US" dirty="0" err="1"/>
+              <a:t>prefix.delta</a:t>
+            </a:r>
+            <a:r>
+              <a:rPr lang="en-US" dirty="0"/>
+              <a:t> (can also output SAM format)</a:t>
+            </a:r>
+          </a:p>
+          <a:p>
             <a:endParaRPr lang="en-US" dirty="0"/>
           </a:p>
           <a:p>
             <a:r>
               <a:rPr lang="en-US" dirty="0"/>
-              <a:t>most useful options</a:t>
+              <a:t>by default only uses seeds (MEMs or MUMs) that are unique in the reference!</a:t>
+            </a:r>
+          </a:p>
+          <a:p>
+            <a:endParaRPr lang="en-US" dirty="0"/>
+          </a:p>
+          <a:p>
+            <a:r>
+              <a:rPr lang="en-US" dirty="0"/>
+              <a:t>Most useful options</a:t>
             </a:r>
           </a:p>
           <a:p>
             <a:pPr lvl="1"/>
             <a:r>
               <a:rPr lang="en-US" dirty="0"/>
-              <a:t>-l long output format</a:t>
+              <a:t>-l minimum match length</a:t>
             </a:r>
           </a:p>
           <a:p>
             <a:pPr lvl="1"/>
             <a:r>
               <a:rPr lang="en-US" dirty="0"/>
-              <a:t>-c include percent coverage</a:t>
+              <a:t>-c minimum length of cluster of exact matches</a:t>
             </a:r>
           </a:p>
           <a:p>
             <a:pPr lvl="1"/>
             <a:r>
               <a:rPr lang="en-US" dirty="0"/>
-              <a:t>-H remove header</a:t>
-            </a:r>
-          </a:p>
-          <a:p>
-            <a:pPr lvl="1"/>
-            <a:r>
-              <a:rPr lang="en-US" dirty="0"/>
-              <a:t>-r sort alignments by reference coordinate</a:t>
+              <a:t>--batch load reference in batches</a:t>
             </a:r>
           </a:p>
         </p:txBody>
@@ -22120,7 +22158,7 @@
     </p:spTree>
     <p:extLst>
       <p:ext uri="{BB962C8B-B14F-4D97-AF65-F5344CB8AC3E}">
-        <p14:creationId xmlns:p14="http://schemas.microsoft.com/office/powerpoint/2010/main" val="2111751869"/>
+        <p14:creationId xmlns:p14="http://schemas.microsoft.com/office/powerpoint/2010/main" val="2875146467"/>
       </p:ext>
     </p:extLst>
   </p:cSld>
@@ -22152,7 +22190,7 @@
           <p:cNvPr id="2" name="Title 1">
             <a:extLst>
               <a:ext uri="{FF2B5EF4-FFF2-40B4-BE49-F238E27FC236}">
-                <a16:creationId xmlns:a16="http://schemas.microsoft.com/office/drawing/2014/main" id="{46DEFBD4-462B-F64D-06E6-84889BE487BF}"/>
+                <a16:creationId xmlns:a16="http://schemas.microsoft.com/office/drawing/2014/main" id="{5736CCE2-B205-1086-C6A7-8F483B1FB722}"/>
               </a:ext>
             </a:extLst>
           </p:cNvPr>
@@ -22172,6 +22210,171 @@
           <a:p>
             <a:r>
               <a:rPr lang="en-US" dirty="0"/>
+              <a:t>Filtering/viewing nucmer output</a:t>
+            </a:r>
+          </a:p>
+        </p:txBody>
+      </p:sp>
+      <p:sp>
+        <p:nvSpPr>
+          <p:cNvPr id="3" name="Content Placeholder 2">
+            <a:extLst>
+              <a:ext uri="{FF2B5EF4-FFF2-40B4-BE49-F238E27FC236}">
+                <a16:creationId xmlns:a16="http://schemas.microsoft.com/office/drawing/2014/main" id="{D9C3B65E-5593-A906-FF37-FB8A5B95E3BA}"/>
+              </a:ext>
+            </a:extLst>
+          </p:cNvPr>
+          <p:cNvSpPr>
+            <a:spLocks noGrp="1"/>
+          </p:cNvSpPr>
+          <p:nvPr>
+            <p:ph idx="1"/>
+          </p:nvPr>
+        </p:nvSpPr>
+        <p:spPr>
+          <a:xfrm>
+            <a:off x="598619" y="1901950"/>
+            <a:ext cx="11147465" cy="4733855"/>
+          </a:xfrm>
+        </p:spPr>
+        <p:txBody>
+          <a:bodyPr>
+            <a:normAutofit fontScale="85000" lnSpcReduction="20000"/>
+          </a:bodyPr>
+          <a:lstStyle/>
+          <a:p>
+            <a:r>
+              <a:rPr lang="en-US" i="1" dirty="0"/>
+              <a:t>delta-filter</a:t>
+            </a:r>
+            <a:r>
+              <a:rPr lang="en-US" dirty="0"/>
+              <a:t> tool is used to filter the output delta file</a:t>
+            </a:r>
+          </a:p>
+          <a:p>
+            <a:endParaRPr lang="en-US" dirty="0"/>
+          </a:p>
+          <a:p>
+            <a:r>
+              <a:rPr lang="en-US" i="1" dirty="0"/>
+              <a:t>show-aligns</a:t>
+            </a:r>
+            <a:r>
+              <a:rPr lang="en-US" dirty="0"/>
+              <a:t> tool is used to display individual alignments</a:t>
+            </a:r>
+          </a:p>
+          <a:p>
+            <a:endParaRPr lang="en-US" dirty="0"/>
+          </a:p>
+          <a:p>
+            <a:r>
+              <a:rPr lang="en-US" i="1" dirty="0"/>
+              <a:t>show-coords </a:t>
+            </a:r>
+            <a:r>
+              <a:rPr lang="en-US" dirty="0"/>
+              <a:t>tool is used to display the alignment coordinates in human-readable coords format</a:t>
+            </a:r>
+          </a:p>
+          <a:p>
+            <a:pPr marL="0" indent="0">
+              <a:buNone/>
+            </a:pPr>
+            <a:endParaRPr lang="en-US" dirty="0"/>
+          </a:p>
+          <a:p>
+            <a:r>
+              <a:rPr lang="en-US" dirty="0"/>
+              <a:t>most useful options</a:t>
+            </a:r>
+          </a:p>
+          <a:p>
+            <a:pPr lvl="1"/>
+            <a:r>
+              <a:rPr lang="en-US" dirty="0"/>
+              <a:t>-l long output format</a:t>
+            </a:r>
+          </a:p>
+          <a:p>
+            <a:pPr lvl="1"/>
+            <a:r>
+              <a:rPr lang="en-US" dirty="0"/>
+              <a:t>-c include percent coverage</a:t>
+            </a:r>
+          </a:p>
+          <a:p>
+            <a:pPr lvl="1"/>
+            <a:r>
+              <a:rPr lang="en-US" dirty="0"/>
+              <a:t>-H remove header</a:t>
+            </a:r>
+          </a:p>
+          <a:p>
+            <a:pPr lvl="1"/>
+            <a:r>
+              <a:rPr lang="en-US" dirty="0"/>
+              <a:t>-r sort alignments by reference coordinate</a:t>
+            </a:r>
+          </a:p>
+        </p:txBody>
+      </p:sp>
+    </p:spTree>
+    <p:extLst>
+      <p:ext uri="{BB962C8B-B14F-4D97-AF65-F5344CB8AC3E}">
+        <p14:creationId xmlns:p14="http://schemas.microsoft.com/office/powerpoint/2010/main" val="2111751869"/>
+      </p:ext>
+    </p:extLst>
+  </p:cSld>
+  <p:clrMapOvr>
+    <a:masterClrMapping/>
+  </p:clrMapOvr>
+</p:sld>
+</file>
+
+<file path=ppt/slides/slide52.xml><?xml version="1.0" encoding="utf-8"?>
+<p:sld xmlns:a="http://schemas.openxmlformats.org/drawingml/2006/main" xmlns:r="http://schemas.openxmlformats.org/officeDocument/2006/relationships" xmlns:p="http://schemas.openxmlformats.org/presentationml/2006/main">
+  <p:cSld>
+    <p:spTree>
+      <p:nvGrpSpPr>
+        <p:cNvPr id="1" name=""/>
+        <p:cNvGrpSpPr/>
+        <p:nvPr/>
+      </p:nvGrpSpPr>
+      <p:grpSpPr>
+        <a:xfrm>
+          <a:off x="0" y="0"/>
+          <a:ext cx="0" cy="0"/>
+          <a:chOff x="0" y="0"/>
+          <a:chExt cx="0" cy="0"/>
+        </a:xfrm>
+      </p:grpSpPr>
+      <p:sp>
+        <p:nvSpPr>
+          <p:cNvPr id="2" name="Title 1">
+            <a:extLst>
+              <a:ext uri="{FF2B5EF4-FFF2-40B4-BE49-F238E27FC236}">
+                <a16:creationId xmlns:a16="http://schemas.microsoft.com/office/drawing/2014/main" id="{46DEFBD4-462B-F64D-06E6-84889BE487BF}"/>
+              </a:ext>
+            </a:extLst>
+          </p:cNvPr>
+          <p:cNvSpPr>
+            <a:spLocks noGrp="1"/>
+          </p:cNvSpPr>
+          <p:nvPr>
+            <p:ph type="title"/>
+          </p:nvPr>
+        </p:nvSpPr>
+        <p:spPr/>
+        <p:txBody>
+          <a:bodyPr>
+            <a:normAutofit fontScale="90000"/>
+          </a:bodyPr>
+          <a:lstStyle/>
+          <a:p>
+            <a:r>
+              <a:rPr lang="en-US" dirty="0"/>
               <a:t>show-aligns output</a:t>
             </a:r>
           </a:p>
@@ -22201,7 +22404,7 @@
             <a:fld id="{B82CCC60-E8CD-4174-8B1A-7DF615B22EEF}" type="slidenum">
               <a:rPr lang="en-US" smtClean="0"/>
               <a:pPr/>
-              <a:t>51</a:t>
+              <a:t>52</a:t>
             </a:fld>
             <a:endParaRPr lang="en-US"/>
           </a:p>
@@ -22459,7 +22662,7 @@
 </p:sld>
 </file>
 
-<file path=ppt/slides/slide52.xml><?xml version="1.0" encoding="utf-8"?>
+<file path=ppt/slides/slide53.xml><?xml version="1.0" encoding="utf-8"?>
 <p:sld xmlns:a="http://schemas.openxmlformats.org/drawingml/2006/main" xmlns:r="http://schemas.openxmlformats.org/officeDocument/2006/relationships" xmlns:p="http://schemas.openxmlformats.org/presentationml/2006/main">
   <p:cSld>
     <p:spTree>
@@ -22615,7 +22818,7 @@
 </p:sld>
 </file>
 
-<file path=ppt/slides/slide53.xml><?xml version="1.0" encoding="utf-8"?>
+<file path=ppt/slides/slide54.xml><?xml version="1.0" encoding="utf-8"?>
 <p:sld xmlns:a="http://schemas.openxmlformats.org/drawingml/2006/main" xmlns:r="http://schemas.openxmlformats.org/officeDocument/2006/relationships" xmlns:p="http://schemas.openxmlformats.org/presentationml/2006/main">
   <p:cSld>
     <p:spTree>
@@ -22793,7 +22996,7 @@
 </p:sld>
 </file>
 
-<file path=ppt/slides/slide54.xml><?xml version="1.0" encoding="utf-8"?>
+<file path=ppt/slides/slide55.xml><?xml version="1.0" encoding="utf-8"?>
 <p:sld xmlns:a="http://schemas.openxmlformats.org/drawingml/2006/main" xmlns:r="http://schemas.openxmlformats.org/officeDocument/2006/relationships" xmlns:p="http://schemas.openxmlformats.org/presentationml/2006/main">
   <p:cSld>
     <p:spTree>
@@ -23018,7 +23221,7 @@
 </p:sld>
 </file>
 
-<file path=ppt/slides/slide55.xml><?xml version="1.0" encoding="utf-8"?>
+<file path=ppt/slides/slide56.xml><?xml version="1.0" encoding="utf-8"?>
 <p:sld xmlns:a="http://schemas.openxmlformats.org/drawingml/2006/main" xmlns:r="http://schemas.openxmlformats.org/officeDocument/2006/relationships" xmlns:p="http://schemas.openxmlformats.org/presentationml/2006/main">
   <p:cSld>
     <p:spTree>
@@ -23196,7 +23399,7 @@
 </p:sld>
 </file>
 
-<file path=ppt/slides/slide56.xml><?xml version="1.0" encoding="utf-8"?>
+<file path=ppt/slides/slide57.xml><?xml version="1.0" encoding="utf-8"?>
 <p:sld xmlns:a="http://schemas.openxmlformats.org/drawingml/2006/main" xmlns:r="http://schemas.openxmlformats.org/officeDocument/2006/relationships" xmlns:p="http://schemas.openxmlformats.org/presentationml/2006/main">
   <p:cSld>
     <p:spTree>
@@ -23364,7 +23567,7 @@
 </p:sld>
 </file>
 
-<file path=ppt/slides/slide57.xml><?xml version="1.0" encoding="utf-8"?>
+<file path=ppt/slides/slide58.xml><?xml version="1.0" encoding="utf-8"?>
 <p:sld xmlns:a="http://schemas.openxmlformats.org/drawingml/2006/main" xmlns:r="http://schemas.openxmlformats.org/officeDocument/2006/relationships" xmlns:p="http://schemas.openxmlformats.org/presentationml/2006/main">
   <p:cSld>
     <p:spTree>
@@ -23507,7 +23710,7 @@
 </p:sld>
 </file>
 
-<file path=ppt/slides/slide58.xml><?xml version="1.0" encoding="utf-8"?>
+<file path=ppt/slides/slide59.xml><?xml version="1.0" encoding="utf-8"?>
 <p:sld xmlns:a="http://schemas.openxmlformats.org/drawingml/2006/main" xmlns:r="http://schemas.openxmlformats.org/officeDocument/2006/relationships" xmlns:p="http://schemas.openxmlformats.org/presentationml/2006/main">
   <p:cSld>
     <p:spTree>
@@ -23773,181 +23976,6 @@
     <p:extLst>
       <p:ext uri="{BB962C8B-B14F-4D97-AF65-F5344CB8AC3E}">
         <p14:creationId xmlns:p14="http://schemas.microsoft.com/office/powerpoint/2010/main" val="3372661809"/>
-      </p:ext>
-    </p:extLst>
-  </p:cSld>
-  <p:clrMapOvr>
-    <a:masterClrMapping/>
-  </p:clrMapOvr>
-</p:sld>
-</file>
-
-<file path=ppt/slides/slide59.xml><?xml version="1.0" encoding="utf-8"?>
-<p:sld xmlns:a="http://schemas.openxmlformats.org/drawingml/2006/main" xmlns:r="http://schemas.openxmlformats.org/officeDocument/2006/relationships" xmlns:p="http://schemas.openxmlformats.org/presentationml/2006/main">
-  <p:cSld>
-    <p:spTree>
-      <p:nvGrpSpPr>
-        <p:cNvPr id="1" name="">
-          <a:extLst>
-            <a:ext uri="{FF2B5EF4-FFF2-40B4-BE49-F238E27FC236}">
-              <a16:creationId xmlns:a16="http://schemas.microsoft.com/office/drawing/2014/main" id="{EDCCD2F0-A8B7-BA6F-127C-6E4BCC9D478D}"/>
-            </a:ext>
-          </a:extLst>
-        </p:cNvPr>
-        <p:cNvGrpSpPr/>
-        <p:nvPr/>
-      </p:nvGrpSpPr>
-      <p:grpSpPr>
-        <a:xfrm>
-          <a:off x="0" y="0"/>
-          <a:ext cx="0" cy="0"/>
-          <a:chOff x="0" y="0"/>
-          <a:chExt cx="0" cy="0"/>
-        </a:xfrm>
-      </p:grpSpPr>
-      <p:sp>
-        <p:nvSpPr>
-          <p:cNvPr id="2" name="Title 1">
-            <a:extLst>
-              <a:ext uri="{FF2B5EF4-FFF2-40B4-BE49-F238E27FC236}">
-                <a16:creationId xmlns:a16="http://schemas.microsoft.com/office/drawing/2014/main" id="{1517273F-2DCD-B71C-CE05-552A10E66107}"/>
-              </a:ext>
-            </a:extLst>
-          </p:cNvPr>
-          <p:cNvSpPr>
-            <a:spLocks noGrp="1"/>
-          </p:cNvSpPr>
-          <p:nvPr>
-            <p:ph type="title"/>
-          </p:nvPr>
-        </p:nvSpPr>
-        <p:spPr/>
-        <p:txBody>
-          <a:bodyPr>
-            <a:normAutofit fontScale="90000"/>
-          </a:bodyPr>
-          <a:lstStyle/>
-          <a:p>
-            <a:r>
-              <a:rPr lang="en-US" dirty="0"/>
-              <a:t>Alignment programs</a:t>
-            </a:r>
-          </a:p>
-        </p:txBody>
-      </p:sp>
-      <p:sp>
-        <p:nvSpPr>
-          <p:cNvPr id="3" name="Content Placeholder 2">
-            <a:extLst>
-              <a:ext uri="{FF2B5EF4-FFF2-40B4-BE49-F238E27FC236}">
-                <a16:creationId xmlns:a16="http://schemas.microsoft.com/office/drawing/2014/main" id="{CF473E17-796F-96D5-C9A3-B6F5A5A52CC0}"/>
-              </a:ext>
-            </a:extLst>
-          </p:cNvPr>
-          <p:cNvSpPr>
-            <a:spLocks noGrp="1"/>
-          </p:cNvSpPr>
-          <p:nvPr>
-            <p:ph idx="1"/>
-          </p:nvPr>
-        </p:nvSpPr>
-        <p:spPr>
-          <a:xfrm>
-            <a:off x="838200" y="1597306"/>
-            <a:ext cx="10515600" cy="2020537"/>
-          </a:xfrm>
-        </p:spPr>
-        <p:txBody>
-          <a:bodyPr>
-            <a:normAutofit/>
-          </a:bodyPr>
-          <a:lstStyle/>
-          <a:p>
-            <a:r>
-              <a:rPr lang="en-US" dirty="0"/>
-              <a:t>Bowtie and BWA MEM</a:t>
-            </a:r>
-          </a:p>
-          <a:p>
-            <a:pPr lvl="1"/>
-            <a:r>
-              <a:rPr lang="en-US" dirty="0"/>
-              <a:t>Used for alignment of short and long reads (BWA only) to the genome</a:t>
-            </a:r>
-          </a:p>
-          <a:p>
-            <a:pPr lvl="1"/>
-            <a:r>
-              <a:rPr lang="en-US" dirty="0"/>
-              <a:t>Both based on BWT/SA</a:t>
-            </a:r>
-          </a:p>
-        </p:txBody>
-      </p:sp>
-      <p:pic>
-        <p:nvPicPr>
-          <p:cNvPr id="5" name="Picture 4">
-            <a:extLst>
-              <a:ext uri="{FF2B5EF4-FFF2-40B4-BE49-F238E27FC236}">
-                <a16:creationId xmlns:a16="http://schemas.microsoft.com/office/drawing/2014/main" id="{990BEC29-DF7B-E6FD-0B42-EB1339C27DAE}"/>
-              </a:ext>
-            </a:extLst>
-          </p:cNvPr>
-          <p:cNvPicPr>
-            <a:picLocks noChangeAspect="1"/>
-          </p:cNvPicPr>
-          <p:nvPr/>
-        </p:nvPicPr>
-        <p:blipFill>
-          <a:blip r:embed="rId2"/>
-          <a:stretch>
-            <a:fillRect/>
-          </a:stretch>
-        </p:blipFill>
-        <p:spPr>
-          <a:xfrm>
-            <a:off x="359696" y="3580944"/>
-            <a:ext cx="5139354" cy="2941660"/>
-          </a:xfrm>
-          <a:prstGeom prst="rect">
-            <a:avLst/>
-          </a:prstGeom>
-        </p:spPr>
-      </p:pic>
-      <p:pic>
-        <p:nvPicPr>
-          <p:cNvPr id="7" name="Picture 6">
-            <a:extLst>
-              <a:ext uri="{FF2B5EF4-FFF2-40B4-BE49-F238E27FC236}">
-                <a16:creationId xmlns:a16="http://schemas.microsoft.com/office/drawing/2014/main" id="{08A700C4-6223-FE27-A002-D96CB20AB03D}"/>
-              </a:ext>
-            </a:extLst>
-          </p:cNvPr>
-          <p:cNvPicPr>
-            <a:picLocks noChangeAspect="1"/>
-          </p:cNvPicPr>
-          <p:nvPr/>
-        </p:nvPicPr>
-        <p:blipFill>
-          <a:blip r:embed="rId3"/>
-          <a:stretch>
-            <a:fillRect/>
-          </a:stretch>
-        </p:blipFill>
-        <p:spPr>
-          <a:xfrm>
-            <a:off x="5882618" y="2750872"/>
-            <a:ext cx="6216127" cy="3875216"/>
-          </a:xfrm>
-          <a:prstGeom prst="rect">
-            <a:avLst/>
-          </a:prstGeom>
-        </p:spPr>
-      </p:pic>
-    </p:spTree>
-    <p:extLst>
-      <p:ext uri="{BB962C8B-B14F-4D97-AF65-F5344CB8AC3E}">
-        <p14:creationId xmlns:p14="http://schemas.microsoft.com/office/powerpoint/2010/main" val="4261880005"/>
       </p:ext>
     </p:extLst>
   </p:cSld>
@@ -24382,7 +24410,13 @@
   <p:cSld>
     <p:spTree>
       <p:nvGrpSpPr>
-        <p:cNvPr id="1" name=""/>
+        <p:cNvPr id="1" name="">
+          <a:extLst>
+            <a:ext uri="{FF2B5EF4-FFF2-40B4-BE49-F238E27FC236}">
+              <a16:creationId xmlns:a16="http://schemas.microsoft.com/office/drawing/2014/main" id="{EDCCD2F0-A8B7-BA6F-127C-6E4BCC9D478D}"/>
+            </a:ext>
+          </a:extLst>
+        </p:cNvPr>
         <p:cNvGrpSpPr/>
         <p:nvPr/>
       </p:nvGrpSpPr>
@@ -24399,7 +24433,7 @@
           <p:cNvPr id="2" name="Title 1">
             <a:extLst>
               <a:ext uri="{FF2B5EF4-FFF2-40B4-BE49-F238E27FC236}">
-                <a16:creationId xmlns:a16="http://schemas.microsoft.com/office/drawing/2014/main" id="{F2E97D2C-0775-B65D-DD66-E12507078C61}"/>
+                <a16:creationId xmlns:a16="http://schemas.microsoft.com/office/drawing/2014/main" id="{1517273F-2DCD-B71C-CE05-552A10E66107}"/>
               </a:ext>
             </a:extLst>
           </p:cNvPr>
@@ -24419,7 +24453,7 @@
           <a:p>
             <a:r>
               <a:rPr lang="en-US" dirty="0"/>
-              <a:t>Alignment file formats</a:t>
+              <a:t>Alignment programs</a:t>
             </a:r>
           </a:p>
         </p:txBody>
@@ -24429,7 +24463,7 @@
           <p:cNvPr id="3" name="Content Placeholder 2">
             <a:extLst>
               <a:ext uri="{FF2B5EF4-FFF2-40B4-BE49-F238E27FC236}">
-                <a16:creationId xmlns:a16="http://schemas.microsoft.com/office/drawing/2014/main" id="{ABB2587C-A2DB-034F-59ED-1C6635C29F6F}"/>
+                <a16:creationId xmlns:a16="http://schemas.microsoft.com/office/drawing/2014/main" id="{CF473E17-796F-96D5-C9A3-B6F5A5A52CC0}"/>
               </a:ext>
             </a:extLst>
           </p:cNvPr>
@@ -24442,81 +24476,101 @@
         </p:nvSpPr>
         <p:spPr>
           <a:xfrm>
-            <a:off x="598620" y="2258887"/>
-            <a:ext cx="10972800" cy="3918803"/>
+            <a:off x="838200" y="1597306"/>
+            <a:ext cx="10515600" cy="2020537"/>
           </a:xfrm>
         </p:spPr>
         <p:txBody>
           <a:bodyPr>
-            <a:normAutofit fontScale="85000" lnSpcReduction="10000"/>
+            <a:normAutofit/>
           </a:bodyPr>
           <a:lstStyle/>
           <a:p>
             <a:r>
               <a:rPr lang="en-US" dirty="0"/>
-              <a:t>BED (Browser Extensible Data) – a nice format to represent alignment intervals</a:t>
-            </a:r>
-          </a:p>
-          <a:p>
-            <a:endParaRPr lang="en-US" dirty="0"/>
-          </a:p>
-          <a:p>
-            <a:r>
-              <a:rPr lang="en-US" dirty="0"/>
-              <a:t>SAM/BAM – typically used for alignments of short reads to the genomic sequence</a:t>
+              <a:t>Bowtie and BWA MEM</a:t>
             </a:r>
           </a:p>
           <a:p>
             <a:pPr lvl="1"/>
             <a:r>
               <a:rPr lang="en-US" dirty="0"/>
-              <a:t>BAM is the compressed version of SAM</a:t>
-            </a:r>
-          </a:p>
-          <a:p>
-            <a:pPr marL="0" indent="0">
-              <a:buNone/>
-            </a:pPr>
-            <a:endParaRPr lang="en-US" dirty="0"/>
-          </a:p>
-          <a:p>
-            <a:r>
-              <a:rPr lang="en-US" dirty="0"/>
-              <a:t>delta/coords – typically used for alignments of two genome sequences, used by mummer package</a:t>
-            </a:r>
-          </a:p>
-          <a:p>
-            <a:endParaRPr lang="en-US" dirty="0"/>
-          </a:p>
-          <a:p>
-            <a:r>
-              <a:rPr lang="en-US" dirty="0"/>
-              <a:t>PAF – Pairwise </a:t>
-            </a:r>
-            <a:r>
-              <a:rPr lang="en-US" dirty="0" err="1"/>
-              <a:t>mApping</a:t>
-            </a:r>
-            <a:r>
-              <a:rPr lang="en-US" dirty="0"/>
-              <a:t> Format, output by minimap2</a:t>
-            </a:r>
-          </a:p>
-          <a:p>
-            <a:pPr marL="0" indent="0">
-              <a:buNone/>
-            </a:pPr>
-            <a:endParaRPr lang="en-US" dirty="0"/>
-          </a:p>
-          <a:p>
-            <a:endParaRPr lang="en-US" dirty="0"/>
-          </a:p>
-        </p:txBody>
-      </p:sp>
+              <a:t>Used for alignment of short and long reads (BWA only) to the genome</a:t>
+            </a:r>
+          </a:p>
+          <a:p>
+            <a:pPr lvl="1"/>
+            <a:r>
+              <a:rPr lang="en-US" dirty="0"/>
+              <a:t>Both based on BWT/SA</a:t>
+            </a:r>
+          </a:p>
+        </p:txBody>
+      </p:sp>
+      <p:pic>
+        <p:nvPicPr>
+          <p:cNvPr id="5" name="Picture 4">
+            <a:extLst>
+              <a:ext uri="{FF2B5EF4-FFF2-40B4-BE49-F238E27FC236}">
+                <a16:creationId xmlns:a16="http://schemas.microsoft.com/office/drawing/2014/main" id="{990BEC29-DF7B-E6FD-0B42-EB1339C27DAE}"/>
+              </a:ext>
+            </a:extLst>
+          </p:cNvPr>
+          <p:cNvPicPr>
+            <a:picLocks noChangeAspect="1"/>
+          </p:cNvPicPr>
+          <p:nvPr/>
+        </p:nvPicPr>
+        <p:blipFill>
+          <a:blip r:embed="rId2"/>
+          <a:stretch>
+            <a:fillRect/>
+          </a:stretch>
+        </p:blipFill>
+        <p:spPr>
+          <a:xfrm>
+            <a:off x="359696" y="3580944"/>
+            <a:ext cx="5139354" cy="2941660"/>
+          </a:xfrm>
+          <a:prstGeom prst="rect">
+            <a:avLst/>
+          </a:prstGeom>
+        </p:spPr>
+      </p:pic>
+      <p:pic>
+        <p:nvPicPr>
+          <p:cNvPr id="7" name="Picture 6">
+            <a:extLst>
+              <a:ext uri="{FF2B5EF4-FFF2-40B4-BE49-F238E27FC236}">
+                <a16:creationId xmlns:a16="http://schemas.microsoft.com/office/drawing/2014/main" id="{08A700C4-6223-FE27-A002-D96CB20AB03D}"/>
+              </a:ext>
+            </a:extLst>
+          </p:cNvPr>
+          <p:cNvPicPr>
+            <a:picLocks noChangeAspect="1"/>
+          </p:cNvPicPr>
+          <p:nvPr/>
+        </p:nvPicPr>
+        <p:blipFill>
+          <a:blip r:embed="rId3"/>
+          <a:stretch>
+            <a:fillRect/>
+          </a:stretch>
+        </p:blipFill>
+        <p:spPr>
+          <a:xfrm>
+            <a:off x="5882618" y="2750872"/>
+            <a:ext cx="6216127" cy="3875216"/>
+          </a:xfrm>
+          <a:prstGeom prst="rect">
+            <a:avLst/>
+          </a:prstGeom>
+        </p:spPr>
+      </p:pic>
     </p:spTree>
     <p:extLst>
       <p:ext uri="{BB962C8B-B14F-4D97-AF65-F5344CB8AC3E}">
-        <p14:creationId xmlns:p14="http://schemas.microsoft.com/office/powerpoint/2010/main" val="1898564496"/>
+        <p14:creationId xmlns:p14="http://schemas.microsoft.com/office/powerpoint/2010/main" val="4261880005"/>
       </p:ext>
     </p:extLst>
   </p:cSld>
@@ -24548,7 +24602,7 @@
           <p:cNvPr id="2" name="Title 1">
             <a:extLst>
               <a:ext uri="{FF2B5EF4-FFF2-40B4-BE49-F238E27FC236}">
-                <a16:creationId xmlns:a16="http://schemas.microsoft.com/office/drawing/2014/main" id="{7BC11982-7360-9AEE-1803-8190DA65065D}"/>
+                <a16:creationId xmlns:a16="http://schemas.microsoft.com/office/drawing/2014/main" id="{F2E97D2C-0775-B65D-DD66-E12507078C61}"/>
               </a:ext>
             </a:extLst>
           </p:cNvPr>
@@ -24568,6 +24622,155 @@
           <a:p>
             <a:r>
               <a:rPr lang="en-US" dirty="0"/>
+              <a:t>Alignment file formats</a:t>
+            </a:r>
+          </a:p>
+        </p:txBody>
+      </p:sp>
+      <p:sp>
+        <p:nvSpPr>
+          <p:cNvPr id="3" name="Content Placeholder 2">
+            <a:extLst>
+              <a:ext uri="{FF2B5EF4-FFF2-40B4-BE49-F238E27FC236}">
+                <a16:creationId xmlns:a16="http://schemas.microsoft.com/office/drawing/2014/main" id="{ABB2587C-A2DB-034F-59ED-1C6635C29F6F}"/>
+              </a:ext>
+            </a:extLst>
+          </p:cNvPr>
+          <p:cNvSpPr>
+            <a:spLocks noGrp="1"/>
+          </p:cNvSpPr>
+          <p:nvPr>
+            <p:ph idx="1"/>
+          </p:nvPr>
+        </p:nvSpPr>
+        <p:spPr>
+          <a:xfrm>
+            <a:off x="598620" y="2258887"/>
+            <a:ext cx="10972800" cy="3918803"/>
+          </a:xfrm>
+        </p:spPr>
+        <p:txBody>
+          <a:bodyPr>
+            <a:normAutofit fontScale="85000" lnSpcReduction="10000"/>
+          </a:bodyPr>
+          <a:lstStyle/>
+          <a:p>
+            <a:r>
+              <a:rPr lang="en-US" dirty="0"/>
+              <a:t>BED (Browser Extensible Data) – a nice format to represent alignment intervals</a:t>
+            </a:r>
+          </a:p>
+          <a:p>
+            <a:endParaRPr lang="en-US" dirty="0"/>
+          </a:p>
+          <a:p>
+            <a:r>
+              <a:rPr lang="en-US" dirty="0"/>
+              <a:t>SAM/BAM – typically used for alignments of short reads to the genomic sequence</a:t>
+            </a:r>
+          </a:p>
+          <a:p>
+            <a:pPr lvl="1"/>
+            <a:r>
+              <a:rPr lang="en-US" dirty="0"/>
+              <a:t>BAM is the compressed version of SAM</a:t>
+            </a:r>
+          </a:p>
+          <a:p>
+            <a:pPr marL="0" indent="0">
+              <a:buNone/>
+            </a:pPr>
+            <a:endParaRPr lang="en-US" dirty="0"/>
+          </a:p>
+          <a:p>
+            <a:r>
+              <a:rPr lang="en-US" dirty="0"/>
+              <a:t>delta/coords – typically used for alignments of two genome sequences, used by mummer package</a:t>
+            </a:r>
+          </a:p>
+          <a:p>
+            <a:endParaRPr lang="en-US" dirty="0"/>
+          </a:p>
+          <a:p>
+            <a:r>
+              <a:rPr lang="en-US" dirty="0"/>
+              <a:t>PAF – Pairwise </a:t>
+            </a:r>
+            <a:r>
+              <a:rPr lang="en-US" dirty="0" err="1"/>
+              <a:t>mApping</a:t>
+            </a:r>
+            <a:r>
+              <a:rPr lang="en-US" dirty="0"/>
+              <a:t> Format, output by minimap2</a:t>
+            </a:r>
+          </a:p>
+          <a:p>
+            <a:pPr marL="0" indent="0">
+              <a:buNone/>
+            </a:pPr>
+            <a:endParaRPr lang="en-US" dirty="0"/>
+          </a:p>
+          <a:p>
+            <a:endParaRPr lang="en-US" dirty="0"/>
+          </a:p>
+        </p:txBody>
+      </p:sp>
+    </p:spTree>
+    <p:extLst>
+      <p:ext uri="{BB962C8B-B14F-4D97-AF65-F5344CB8AC3E}">
+        <p14:creationId xmlns:p14="http://schemas.microsoft.com/office/powerpoint/2010/main" val="1898564496"/>
+      </p:ext>
+    </p:extLst>
+  </p:cSld>
+  <p:clrMapOvr>
+    <a:masterClrMapping/>
+  </p:clrMapOvr>
+</p:sld>
+</file>
+
+<file path=ppt/slides/slide62.xml><?xml version="1.0" encoding="utf-8"?>
+<p:sld xmlns:a="http://schemas.openxmlformats.org/drawingml/2006/main" xmlns:r="http://schemas.openxmlformats.org/officeDocument/2006/relationships" xmlns:p="http://schemas.openxmlformats.org/presentationml/2006/main">
+  <p:cSld>
+    <p:spTree>
+      <p:nvGrpSpPr>
+        <p:cNvPr id="1" name=""/>
+        <p:cNvGrpSpPr/>
+        <p:nvPr/>
+      </p:nvGrpSpPr>
+      <p:grpSpPr>
+        <a:xfrm>
+          <a:off x="0" y="0"/>
+          <a:ext cx="0" cy="0"/>
+          <a:chOff x="0" y="0"/>
+          <a:chExt cx="0" cy="0"/>
+        </a:xfrm>
+      </p:grpSpPr>
+      <p:sp>
+        <p:nvSpPr>
+          <p:cNvPr id="2" name="Title 1">
+            <a:extLst>
+              <a:ext uri="{FF2B5EF4-FFF2-40B4-BE49-F238E27FC236}">
+                <a16:creationId xmlns:a16="http://schemas.microsoft.com/office/drawing/2014/main" id="{7BC11982-7360-9AEE-1803-8190DA65065D}"/>
+              </a:ext>
+            </a:extLst>
+          </p:cNvPr>
+          <p:cNvSpPr>
+            <a:spLocks noGrp="1"/>
+          </p:cNvSpPr>
+          <p:nvPr>
+            <p:ph type="title"/>
+          </p:nvPr>
+        </p:nvSpPr>
+        <p:spPr/>
+        <p:txBody>
+          <a:bodyPr>
+            <a:normAutofit fontScale="90000"/>
+          </a:bodyPr>
+          <a:lstStyle/>
+          <a:p>
+            <a:r>
+              <a:rPr lang="en-US" dirty="0"/>
               <a:t>BED format</a:t>
             </a:r>
           </a:p>
@@ -24597,7 +24800,7 @@
             <a:fld id="{B82CCC60-E8CD-4174-8B1A-7DF615B22EEF}" type="slidenum">
               <a:rPr lang="en-US" smtClean="0"/>
               <a:pPr/>
-              <a:t>61</a:t>
+              <a:t>62</a:t>
             </a:fld>
             <a:endParaRPr lang="en-US"/>
           </a:p>
@@ -24789,7 +24992,7 @@
 </p:sld>
 </file>
 
-<file path=ppt/slides/slide62.xml><?xml version="1.0" encoding="utf-8"?>
+<file path=ppt/slides/slide63.xml><?xml version="1.0" encoding="utf-8"?>
 <p:sld xmlns:a="http://schemas.openxmlformats.org/drawingml/2006/main" xmlns:r="http://schemas.openxmlformats.org/officeDocument/2006/relationships" xmlns:p="http://schemas.openxmlformats.org/presentationml/2006/main">
   <p:cSld>
     <p:spTree>
@@ -24921,7 +25124,7 @@
 </p:sld>
 </file>
 
-<file path=ppt/slides/slide63.xml><?xml version="1.0" encoding="utf-8"?>
+<file path=ppt/slides/slide64.xml><?xml version="1.0" encoding="utf-8"?>
 <p:sld xmlns:a="http://schemas.openxmlformats.org/drawingml/2006/main" xmlns:r="http://schemas.openxmlformats.org/officeDocument/2006/relationships" xmlns:p="http://schemas.openxmlformats.org/presentationml/2006/main">
   <p:cSld>
     <p:spTree>
@@ -25106,7 +25309,7 @@
 </p:sld>
 </file>
 
-<file path=ppt/slides/slide64.xml><?xml version="1.0" encoding="utf-8"?>
+<file path=ppt/slides/slide65.xml><?xml version="1.0" encoding="utf-8"?>
 <p:sld xmlns:a="http://schemas.openxmlformats.org/drawingml/2006/main" xmlns:r="http://schemas.openxmlformats.org/officeDocument/2006/relationships" xmlns:p="http://schemas.openxmlformats.org/presentationml/2006/main">
   <p:cSld>
     <p:spTree>
@@ -25354,7 +25557,7 @@
 </p:sld>
 </file>
 
-<file path=ppt/slides/slide65.xml><?xml version="1.0" encoding="utf-8"?>
+<file path=ppt/slides/slide66.xml><?xml version="1.0" encoding="utf-8"?>
 <p:sld xmlns:a="http://schemas.openxmlformats.org/drawingml/2006/main" xmlns:r="http://schemas.openxmlformats.org/officeDocument/2006/relationships" xmlns:p="http://schemas.openxmlformats.org/presentationml/2006/main">
   <p:cSld>
     <p:spTree>
@@ -25539,7 +25742,7 @@
 </p:sld>
 </file>
 
-<file path=ppt/slides/slide66.xml><?xml version="1.0" encoding="utf-8"?>
+<file path=ppt/slides/slide67.xml><?xml version="1.0" encoding="utf-8"?>
 <p:sld xmlns:a="http://schemas.openxmlformats.org/drawingml/2006/main" xmlns:r="http://schemas.openxmlformats.org/officeDocument/2006/relationships" xmlns:p="http://schemas.openxmlformats.org/presentationml/2006/main">
   <p:cSld>
     <p:spTree>
@@ -25669,7 +25872,7 @@
 </p:sld>
 </file>
 
-<file path=ppt/slides/slide67.xml><?xml version="1.0" encoding="utf-8"?>
+<file path=ppt/slides/slide68.xml><?xml version="1.0" encoding="utf-8"?>
 <p:sld xmlns:a="http://schemas.openxmlformats.org/drawingml/2006/main" xmlns:r="http://schemas.openxmlformats.org/officeDocument/2006/relationships" xmlns:p="http://schemas.openxmlformats.org/presentationml/2006/main">
   <p:cSld>
     <p:spTree>
@@ -25865,7 +26068,7 @@
 </p:sld>
 </file>
 
-<file path=ppt/slides/slide68.xml><?xml version="1.0" encoding="utf-8"?>
+<file path=ppt/slides/slide69.xml><?xml version="1.0" encoding="utf-8"?>
 <p:sld xmlns:a="http://schemas.openxmlformats.org/drawingml/2006/main" xmlns:r="http://schemas.openxmlformats.org/officeDocument/2006/relationships" xmlns:p="http://schemas.openxmlformats.org/presentationml/2006/main">
   <p:cSld>
     <p:spTree>
@@ -26273,328 +26476,6 @@
 </p:sld>
 </file>
 
-<file path=ppt/slides/slide69.xml><?xml version="1.0" encoding="utf-8"?>
-<p:sld xmlns:a="http://schemas.openxmlformats.org/drawingml/2006/main" xmlns:r="http://schemas.openxmlformats.org/officeDocument/2006/relationships" xmlns:p="http://schemas.openxmlformats.org/presentationml/2006/main">
-  <p:cSld>
-    <p:spTree>
-      <p:nvGrpSpPr>
-        <p:cNvPr id="1" name="">
-          <a:extLst>
-            <a:ext uri="{FF2B5EF4-FFF2-40B4-BE49-F238E27FC236}">
-              <a16:creationId xmlns:a16="http://schemas.microsoft.com/office/drawing/2014/main" id="{331AF108-D375-0C3A-DCAC-D7D7BC19D20D}"/>
-            </a:ext>
-          </a:extLst>
-        </p:cNvPr>
-        <p:cNvGrpSpPr/>
-        <p:nvPr/>
-      </p:nvGrpSpPr>
-      <p:grpSpPr>
-        <a:xfrm>
-          <a:off x="0" y="0"/>
-          <a:ext cx="0" cy="0"/>
-          <a:chOff x="0" y="0"/>
-          <a:chExt cx="0" cy="0"/>
-        </a:xfrm>
-      </p:grpSpPr>
-      <p:pic>
-        <p:nvPicPr>
-          <p:cNvPr id="7" name="Picture 6">
-            <a:extLst>
-              <a:ext uri="{FF2B5EF4-FFF2-40B4-BE49-F238E27FC236}">
-                <a16:creationId xmlns:a16="http://schemas.microsoft.com/office/drawing/2014/main" id="{98142D10-13F6-28B9-8CE0-6A3E8A2F236D}"/>
-              </a:ext>
-            </a:extLst>
-          </p:cNvPr>
-          <p:cNvPicPr>
-            <a:picLocks noChangeAspect="1"/>
-          </p:cNvPicPr>
-          <p:nvPr/>
-        </p:nvPicPr>
-        <p:blipFill>
-          <a:blip r:embed="rId2"/>
-          <a:stretch>
-            <a:fillRect/>
-          </a:stretch>
-        </p:blipFill>
-        <p:spPr>
-          <a:xfrm>
-            <a:off x="309031" y="4255227"/>
-            <a:ext cx="10593278" cy="2429214"/>
-          </a:xfrm>
-          <a:prstGeom prst="rect">
-            <a:avLst/>
-          </a:prstGeom>
-        </p:spPr>
-      </p:pic>
-      <p:sp>
-        <p:nvSpPr>
-          <p:cNvPr id="2" name="Title 1">
-            <a:extLst>
-              <a:ext uri="{FF2B5EF4-FFF2-40B4-BE49-F238E27FC236}">
-                <a16:creationId xmlns:a16="http://schemas.microsoft.com/office/drawing/2014/main" id="{30B01D0F-3551-069E-AD5F-170E603CD365}"/>
-              </a:ext>
-            </a:extLst>
-          </p:cNvPr>
-          <p:cNvSpPr>
-            <a:spLocks noGrp="1"/>
-          </p:cNvSpPr>
-          <p:nvPr>
-            <p:ph type="title"/>
-          </p:nvPr>
-        </p:nvSpPr>
-        <p:spPr/>
-        <p:txBody>
-          <a:bodyPr>
-            <a:normAutofit fontScale="90000"/>
-          </a:bodyPr>
-          <a:lstStyle/>
-          <a:p>
-            <a:r>
-              <a:rPr lang="en-US" dirty="0"/>
-              <a:t>SAM format           </a:t>
-            </a:r>
-            <a:r>
-              <a:rPr lang="en-US" sz="2400" dirty="0"/>
-              <a:t>https://samtools.github.io/hts-specs/SAMv1.pdf</a:t>
-            </a:r>
-          </a:p>
-        </p:txBody>
-      </p:sp>
-      <p:sp>
-        <p:nvSpPr>
-          <p:cNvPr id="3" name="Content Placeholder 2">
-            <a:extLst>
-              <a:ext uri="{FF2B5EF4-FFF2-40B4-BE49-F238E27FC236}">
-                <a16:creationId xmlns:a16="http://schemas.microsoft.com/office/drawing/2014/main" id="{5033ECAE-BC3B-4628-FD7C-993EBBF760C5}"/>
-              </a:ext>
-            </a:extLst>
-          </p:cNvPr>
-          <p:cNvSpPr>
-            <a:spLocks noGrp="1"/>
-          </p:cNvSpPr>
-          <p:nvPr>
-            <p:ph idx="1"/>
-          </p:nvPr>
-        </p:nvSpPr>
-        <p:spPr>
-          <a:xfrm>
-            <a:off x="7917084" y="1690688"/>
-            <a:ext cx="3853404" cy="4351338"/>
-          </a:xfrm>
-        </p:spPr>
-        <p:txBody>
-          <a:bodyPr/>
-          <a:lstStyle/>
-          <a:p>
-            <a:r>
-              <a:rPr lang="en-US" dirty="0"/>
-              <a:t>Suppose we have the following alignment</a:t>
-            </a:r>
-          </a:p>
-          <a:p>
-            <a:endParaRPr lang="en-US" dirty="0"/>
-          </a:p>
-          <a:p>
-            <a:r>
-              <a:rPr lang="en-US" dirty="0"/>
-              <a:t>It will look like this in the SAM file</a:t>
-            </a:r>
-          </a:p>
-          <a:p>
-            <a:r>
-              <a:rPr lang="en-US" dirty="0"/>
-              <a:t>Coordinates are 1-based</a:t>
-            </a:r>
-          </a:p>
-        </p:txBody>
-      </p:sp>
-      <p:pic>
-        <p:nvPicPr>
-          <p:cNvPr id="5" name="Picture 4">
-            <a:extLst>
-              <a:ext uri="{FF2B5EF4-FFF2-40B4-BE49-F238E27FC236}">
-                <a16:creationId xmlns:a16="http://schemas.microsoft.com/office/drawing/2014/main" id="{B87DB4CD-5225-B83B-287B-15D179857159}"/>
-              </a:ext>
-            </a:extLst>
-          </p:cNvPr>
-          <p:cNvPicPr>
-            <a:picLocks noChangeAspect="1"/>
-          </p:cNvPicPr>
-          <p:nvPr/>
-        </p:nvPicPr>
-        <p:blipFill>
-          <a:blip r:embed="rId3"/>
-          <a:stretch>
-            <a:fillRect/>
-          </a:stretch>
-        </p:blipFill>
-        <p:spPr>
-          <a:xfrm>
-            <a:off x="309031" y="1484618"/>
-            <a:ext cx="7608053" cy="2694902"/>
-          </a:xfrm>
-          <a:prstGeom prst="rect">
-            <a:avLst/>
-          </a:prstGeom>
-        </p:spPr>
-      </p:pic>
-      <p:cxnSp>
-        <p:nvCxnSpPr>
-          <p:cNvPr id="12" name="Straight Connector 11">
-            <a:extLst>
-              <a:ext uri="{FF2B5EF4-FFF2-40B4-BE49-F238E27FC236}">
-                <a16:creationId xmlns:a16="http://schemas.microsoft.com/office/drawing/2014/main" id="{3A8BFFA6-3EEC-4319-784B-13F07990881F}"/>
-              </a:ext>
-            </a:extLst>
-          </p:cNvPr>
-          <p:cNvCxnSpPr/>
-          <p:nvPr/>
-        </p:nvCxnSpPr>
-        <p:spPr>
-          <a:xfrm>
-            <a:off x="309031" y="4179520"/>
-            <a:ext cx="7422858" cy="0"/>
-          </a:xfrm>
-          <a:prstGeom prst="line">
-            <a:avLst/>
-          </a:prstGeom>
-        </p:spPr>
-        <p:style>
-          <a:lnRef idx="2">
-            <a:schemeClr val="accent1"/>
-          </a:lnRef>
-          <a:fillRef idx="0">
-            <a:schemeClr val="accent1"/>
-          </a:fillRef>
-          <a:effectRef idx="1">
-            <a:schemeClr val="accent1"/>
-          </a:effectRef>
-          <a:fontRef idx="minor">
-            <a:schemeClr val="tx1"/>
-          </a:fontRef>
-        </p:style>
-      </p:cxnSp>
-      <p:sp>
-        <p:nvSpPr>
-          <p:cNvPr id="4" name="Rectangle 3">
-            <a:extLst>
-              <a:ext uri="{FF2B5EF4-FFF2-40B4-BE49-F238E27FC236}">
-                <a16:creationId xmlns:a16="http://schemas.microsoft.com/office/drawing/2014/main" id="{EC6AD9AE-A5DE-AB87-CC97-A8DA6F3044AB}"/>
-              </a:ext>
-            </a:extLst>
-          </p:cNvPr>
-          <p:cNvSpPr/>
-          <p:nvPr/>
-        </p:nvSpPr>
-        <p:spPr>
-          <a:xfrm>
-            <a:off x="158689" y="2713827"/>
-            <a:ext cx="7422857" cy="1330028"/>
-          </a:xfrm>
-          <a:prstGeom prst="rect">
-            <a:avLst/>
-          </a:prstGeom>
-          <a:solidFill>
-            <a:schemeClr val="bg1"/>
-          </a:solidFill>
-          <a:ln>
-            <a:solidFill>
-              <a:schemeClr val="bg1"/>
-            </a:solidFill>
-          </a:ln>
-        </p:spPr>
-        <p:style>
-          <a:lnRef idx="2">
-            <a:schemeClr val="accent1">
-              <a:shade val="15000"/>
-            </a:schemeClr>
-          </a:lnRef>
-          <a:fillRef idx="1">
-            <a:schemeClr val="accent1"/>
-          </a:fillRef>
-          <a:effectRef idx="0">
-            <a:schemeClr val="accent1"/>
-          </a:effectRef>
-          <a:fontRef idx="minor">
-            <a:schemeClr val="lt1"/>
-          </a:fontRef>
-        </p:style>
-        <p:txBody>
-          <a:bodyPr rtlCol="0" anchor="ctr"/>
-          <a:lstStyle/>
-          <a:p>
-            <a:pPr algn="ctr"/>
-            <a:endParaRPr lang="en-US"/>
-          </a:p>
-        </p:txBody>
-      </p:sp>
-      <p:sp>
-        <p:nvSpPr>
-          <p:cNvPr id="6" name="Rectangle 5">
-            <a:extLst>
-              <a:ext uri="{FF2B5EF4-FFF2-40B4-BE49-F238E27FC236}">
-                <a16:creationId xmlns:a16="http://schemas.microsoft.com/office/drawing/2014/main" id="{163EFB2F-1FB7-11A5-5424-CEF175D08B5D}"/>
-              </a:ext>
-            </a:extLst>
-          </p:cNvPr>
-          <p:cNvSpPr/>
-          <p:nvPr/>
-        </p:nvSpPr>
-        <p:spPr>
-          <a:xfrm>
-            <a:off x="202113" y="5120696"/>
-            <a:ext cx="10494790" cy="1330028"/>
-          </a:xfrm>
-          <a:prstGeom prst="rect">
-            <a:avLst/>
-          </a:prstGeom>
-          <a:solidFill>
-            <a:schemeClr val="bg1"/>
-          </a:solidFill>
-          <a:ln>
-            <a:solidFill>
-              <a:schemeClr val="bg1"/>
-            </a:solidFill>
-          </a:ln>
-        </p:spPr>
-        <p:style>
-          <a:lnRef idx="2">
-            <a:schemeClr val="accent1">
-              <a:shade val="15000"/>
-            </a:schemeClr>
-          </a:lnRef>
-          <a:fillRef idx="1">
-            <a:schemeClr val="accent1"/>
-          </a:fillRef>
-          <a:effectRef idx="0">
-            <a:schemeClr val="accent1"/>
-          </a:effectRef>
-          <a:fontRef idx="minor">
-            <a:schemeClr val="lt1"/>
-          </a:fontRef>
-        </p:style>
-        <p:txBody>
-          <a:bodyPr rtlCol="0" anchor="ctr"/>
-          <a:lstStyle/>
-          <a:p>
-            <a:pPr algn="ctr"/>
-            <a:endParaRPr lang="en-US"/>
-          </a:p>
-        </p:txBody>
-      </p:sp>
-    </p:spTree>
-    <p:extLst>
-      <p:ext uri="{BB962C8B-B14F-4D97-AF65-F5344CB8AC3E}">
-        <p14:creationId xmlns:p14="http://schemas.microsoft.com/office/powerpoint/2010/main" val="3058016975"/>
-      </p:ext>
-    </p:extLst>
-  </p:cSld>
-  <p:clrMapOvr>
-    <a:masterClrMapping/>
-  </p:clrMapOvr>
-</p:sld>
-</file>
-
 <file path=ppt/slides/slide7.xml><?xml version="1.0" encoding="utf-8"?>
 <p:sld xmlns:a="http://schemas.openxmlformats.org/drawingml/2006/main" xmlns:r="http://schemas.openxmlformats.org/officeDocument/2006/relationships" xmlns:p="http://schemas.openxmlformats.org/presentationml/2006/main">
   <p:cSld>
@@ -27044,6 +26925,328 @@
         <p:cNvPr id="1" name="">
           <a:extLst>
             <a:ext uri="{FF2B5EF4-FFF2-40B4-BE49-F238E27FC236}">
+              <a16:creationId xmlns:a16="http://schemas.microsoft.com/office/drawing/2014/main" id="{331AF108-D375-0C3A-DCAC-D7D7BC19D20D}"/>
+            </a:ext>
+          </a:extLst>
+        </p:cNvPr>
+        <p:cNvGrpSpPr/>
+        <p:nvPr/>
+      </p:nvGrpSpPr>
+      <p:grpSpPr>
+        <a:xfrm>
+          <a:off x="0" y="0"/>
+          <a:ext cx="0" cy="0"/>
+          <a:chOff x="0" y="0"/>
+          <a:chExt cx="0" cy="0"/>
+        </a:xfrm>
+      </p:grpSpPr>
+      <p:pic>
+        <p:nvPicPr>
+          <p:cNvPr id="7" name="Picture 6">
+            <a:extLst>
+              <a:ext uri="{FF2B5EF4-FFF2-40B4-BE49-F238E27FC236}">
+                <a16:creationId xmlns:a16="http://schemas.microsoft.com/office/drawing/2014/main" id="{98142D10-13F6-28B9-8CE0-6A3E8A2F236D}"/>
+              </a:ext>
+            </a:extLst>
+          </p:cNvPr>
+          <p:cNvPicPr>
+            <a:picLocks noChangeAspect="1"/>
+          </p:cNvPicPr>
+          <p:nvPr/>
+        </p:nvPicPr>
+        <p:blipFill>
+          <a:blip r:embed="rId2"/>
+          <a:stretch>
+            <a:fillRect/>
+          </a:stretch>
+        </p:blipFill>
+        <p:spPr>
+          <a:xfrm>
+            <a:off x="309031" y="4255227"/>
+            <a:ext cx="10593278" cy="2429214"/>
+          </a:xfrm>
+          <a:prstGeom prst="rect">
+            <a:avLst/>
+          </a:prstGeom>
+        </p:spPr>
+      </p:pic>
+      <p:sp>
+        <p:nvSpPr>
+          <p:cNvPr id="2" name="Title 1">
+            <a:extLst>
+              <a:ext uri="{FF2B5EF4-FFF2-40B4-BE49-F238E27FC236}">
+                <a16:creationId xmlns:a16="http://schemas.microsoft.com/office/drawing/2014/main" id="{30B01D0F-3551-069E-AD5F-170E603CD365}"/>
+              </a:ext>
+            </a:extLst>
+          </p:cNvPr>
+          <p:cNvSpPr>
+            <a:spLocks noGrp="1"/>
+          </p:cNvSpPr>
+          <p:nvPr>
+            <p:ph type="title"/>
+          </p:nvPr>
+        </p:nvSpPr>
+        <p:spPr/>
+        <p:txBody>
+          <a:bodyPr>
+            <a:normAutofit fontScale="90000"/>
+          </a:bodyPr>
+          <a:lstStyle/>
+          <a:p>
+            <a:r>
+              <a:rPr lang="en-US" dirty="0"/>
+              <a:t>SAM format           </a:t>
+            </a:r>
+            <a:r>
+              <a:rPr lang="en-US" sz="2400" dirty="0"/>
+              <a:t>https://samtools.github.io/hts-specs/SAMv1.pdf</a:t>
+            </a:r>
+          </a:p>
+        </p:txBody>
+      </p:sp>
+      <p:sp>
+        <p:nvSpPr>
+          <p:cNvPr id="3" name="Content Placeholder 2">
+            <a:extLst>
+              <a:ext uri="{FF2B5EF4-FFF2-40B4-BE49-F238E27FC236}">
+                <a16:creationId xmlns:a16="http://schemas.microsoft.com/office/drawing/2014/main" id="{5033ECAE-BC3B-4628-FD7C-993EBBF760C5}"/>
+              </a:ext>
+            </a:extLst>
+          </p:cNvPr>
+          <p:cNvSpPr>
+            <a:spLocks noGrp="1"/>
+          </p:cNvSpPr>
+          <p:nvPr>
+            <p:ph idx="1"/>
+          </p:nvPr>
+        </p:nvSpPr>
+        <p:spPr>
+          <a:xfrm>
+            <a:off x="7917084" y="1690688"/>
+            <a:ext cx="3853404" cy="4351338"/>
+          </a:xfrm>
+        </p:spPr>
+        <p:txBody>
+          <a:bodyPr/>
+          <a:lstStyle/>
+          <a:p>
+            <a:r>
+              <a:rPr lang="en-US" dirty="0"/>
+              <a:t>Suppose we have the following alignment</a:t>
+            </a:r>
+          </a:p>
+          <a:p>
+            <a:endParaRPr lang="en-US" dirty="0"/>
+          </a:p>
+          <a:p>
+            <a:r>
+              <a:rPr lang="en-US" dirty="0"/>
+              <a:t>It will look like this in the SAM file</a:t>
+            </a:r>
+          </a:p>
+          <a:p>
+            <a:r>
+              <a:rPr lang="en-US" dirty="0"/>
+              <a:t>Coordinates are 1-based</a:t>
+            </a:r>
+          </a:p>
+        </p:txBody>
+      </p:sp>
+      <p:pic>
+        <p:nvPicPr>
+          <p:cNvPr id="5" name="Picture 4">
+            <a:extLst>
+              <a:ext uri="{FF2B5EF4-FFF2-40B4-BE49-F238E27FC236}">
+                <a16:creationId xmlns:a16="http://schemas.microsoft.com/office/drawing/2014/main" id="{B87DB4CD-5225-B83B-287B-15D179857159}"/>
+              </a:ext>
+            </a:extLst>
+          </p:cNvPr>
+          <p:cNvPicPr>
+            <a:picLocks noChangeAspect="1"/>
+          </p:cNvPicPr>
+          <p:nvPr/>
+        </p:nvPicPr>
+        <p:blipFill>
+          <a:blip r:embed="rId3"/>
+          <a:stretch>
+            <a:fillRect/>
+          </a:stretch>
+        </p:blipFill>
+        <p:spPr>
+          <a:xfrm>
+            <a:off x="309031" y="1484618"/>
+            <a:ext cx="7608053" cy="2694902"/>
+          </a:xfrm>
+          <a:prstGeom prst="rect">
+            <a:avLst/>
+          </a:prstGeom>
+        </p:spPr>
+      </p:pic>
+      <p:cxnSp>
+        <p:nvCxnSpPr>
+          <p:cNvPr id="12" name="Straight Connector 11">
+            <a:extLst>
+              <a:ext uri="{FF2B5EF4-FFF2-40B4-BE49-F238E27FC236}">
+                <a16:creationId xmlns:a16="http://schemas.microsoft.com/office/drawing/2014/main" id="{3A8BFFA6-3EEC-4319-784B-13F07990881F}"/>
+              </a:ext>
+            </a:extLst>
+          </p:cNvPr>
+          <p:cNvCxnSpPr/>
+          <p:nvPr/>
+        </p:nvCxnSpPr>
+        <p:spPr>
+          <a:xfrm>
+            <a:off x="309031" y="4179520"/>
+            <a:ext cx="7422858" cy="0"/>
+          </a:xfrm>
+          <a:prstGeom prst="line">
+            <a:avLst/>
+          </a:prstGeom>
+        </p:spPr>
+        <p:style>
+          <a:lnRef idx="2">
+            <a:schemeClr val="accent1"/>
+          </a:lnRef>
+          <a:fillRef idx="0">
+            <a:schemeClr val="accent1"/>
+          </a:fillRef>
+          <a:effectRef idx="1">
+            <a:schemeClr val="accent1"/>
+          </a:effectRef>
+          <a:fontRef idx="minor">
+            <a:schemeClr val="tx1"/>
+          </a:fontRef>
+        </p:style>
+      </p:cxnSp>
+      <p:sp>
+        <p:nvSpPr>
+          <p:cNvPr id="4" name="Rectangle 3">
+            <a:extLst>
+              <a:ext uri="{FF2B5EF4-FFF2-40B4-BE49-F238E27FC236}">
+                <a16:creationId xmlns:a16="http://schemas.microsoft.com/office/drawing/2014/main" id="{EC6AD9AE-A5DE-AB87-CC97-A8DA6F3044AB}"/>
+              </a:ext>
+            </a:extLst>
+          </p:cNvPr>
+          <p:cNvSpPr/>
+          <p:nvPr/>
+        </p:nvSpPr>
+        <p:spPr>
+          <a:xfrm>
+            <a:off x="158689" y="2713827"/>
+            <a:ext cx="7422857" cy="1330028"/>
+          </a:xfrm>
+          <a:prstGeom prst="rect">
+            <a:avLst/>
+          </a:prstGeom>
+          <a:solidFill>
+            <a:schemeClr val="bg1"/>
+          </a:solidFill>
+          <a:ln>
+            <a:solidFill>
+              <a:schemeClr val="bg1"/>
+            </a:solidFill>
+          </a:ln>
+        </p:spPr>
+        <p:style>
+          <a:lnRef idx="2">
+            <a:schemeClr val="accent1">
+              <a:shade val="15000"/>
+            </a:schemeClr>
+          </a:lnRef>
+          <a:fillRef idx="1">
+            <a:schemeClr val="accent1"/>
+          </a:fillRef>
+          <a:effectRef idx="0">
+            <a:schemeClr val="accent1"/>
+          </a:effectRef>
+          <a:fontRef idx="minor">
+            <a:schemeClr val="lt1"/>
+          </a:fontRef>
+        </p:style>
+        <p:txBody>
+          <a:bodyPr rtlCol="0" anchor="ctr"/>
+          <a:lstStyle/>
+          <a:p>
+            <a:pPr algn="ctr"/>
+            <a:endParaRPr lang="en-US"/>
+          </a:p>
+        </p:txBody>
+      </p:sp>
+      <p:sp>
+        <p:nvSpPr>
+          <p:cNvPr id="6" name="Rectangle 5">
+            <a:extLst>
+              <a:ext uri="{FF2B5EF4-FFF2-40B4-BE49-F238E27FC236}">
+                <a16:creationId xmlns:a16="http://schemas.microsoft.com/office/drawing/2014/main" id="{163EFB2F-1FB7-11A5-5424-CEF175D08B5D}"/>
+              </a:ext>
+            </a:extLst>
+          </p:cNvPr>
+          <p:cNvSpPr/>
+          <p:nvPr/>
+        </p:nvSpPr>
+        <p:spPr>
+          <a:xfrm>
+            <a:off x="202113" y="5120696"/>
+            <a:ext cx="10494790" cy="1330028"/>
+          </a:xfrm>
+          <a:prstGeom prst="rect">
+            <a:avLst/>
+          </a:prstGeom>
+          <a:solidFill>
+            <a:schemeClr val="bg1"/>
+          </a:solidFill>
+          <a:ln>
+            <a:solidFill>
+              <a:schemeClr val="bg1"/>
+            </a:solidFill>
+          </a:ln>
+        </p:spPr>
+        <p:style>
+          <a:lnRef idx="2">
+            <a:schemeClr val="accent1">
+              <a:shade val="15000"/>
+            </a:schemeClr>
+          </a:lnRef>
+          <a:fillRef idx="1">
+            <a:schemeClr val="accent1"/>
+          </a:fillRef>
+          <a:effectRef idx="0">
+            <a:schemeClr val="accent1"/>
+          </a:effectRef>
+          <a:fontRef idx="minor">
+            <a:schemeClr val="lt1"/>
+          </a:fontRef>
+        </p:style>
+        <p:txBody>
+          <a:bodyPr rtlCol="0" anchor="ctr"/>
+          <a:lstStyle/>
+          <a:p>
+            <a:pPr algn="ctr"/>
+            <a:endParaRPr lang="en-US"/>
+          </a:p>
+        </p:txBody>
+      </p:sp>
+    </p:spTree>
+    <p:extLst>
+      <p:ext uri="{BB962C8B-B14F-4D97-AF65-F5344CB8AC3E}">
+        <p14:creationId xmlns:p14="http://schemas.microsoft.com/office/powerpoint/2010/main" val="3058016975"/>
+      </p:ext>
+    </p:extLst>
+  </p:cSld>
+  <p:clrMapOvr>
+    <a:masterClrMapping/>
+  </p:clrMapOvr>
+</p:sld>
+</file>
+
+<file path=ppt/slides/slide71.xml><?xml version="1.0" encoding="utf-8"?>
+<p:sld xmlns:a="http://schemas.openxmlformats.org/drawingml/2006/main" xmlns:r="http://schemas.openxmlformats.org/officeDocument/2006/relationships" xmlns:p="http://schemas.openxmlformats.org/presentationml/2006/main">
+  <p:cSld>
+    <p:spTree>
+      <p:nvGrpSpPr>
+        <p:cNvPr id="1" name="">
+          <a:extLst>
+            <a:ext uri="{FF2B5EF4-FFF2-40B4-BE49-F238E27FC236}">
               <a16:creationId xmlns:a16="http://schemas.microsoft.com/office/drawing/2014/main" id="{0652883A-7B48-2030-1CE2-F8978EEC94A9}"/>
             </a:ext>
           </a:extLst>
@@ -27466,7 +27669,7 @@
 </p:sld>
 </file>
 
-<file path=ppt/slides/slide71.xml><?xml version="1.0" encoding="utf-8"?>
+<file path=ppt/slides/slide72.xml><?xml version="1.0" encoding="utf-8"?>
 <p:sld xmlns:a="http://schemas.openxmlformats.org/drawingml/2006/main" xmlns:r="http://schemas.openxmlformats.org/officeDocument/2006/relationships" xmlns:p="http://schemas.openxmlformats.org/presentationml/2006/main">
   <p:cSld>
     <p:spTree>
@@ -27715,7 +27918,7 @@
 </p:sld>
 </file>
 
-<file path=ppt/slides/slide72.xml><?xml version="1.0" encoding="utf-8"?>
+<file path=ppt/slides/slide73.xml><?xml version="1.0" encoding="utf-8"?>
 <p:sld xmlns:a="http://schemas.openxmlformats.org/drawingml/2006/main" xmlns:r="http://schemas.openxmlformats.org/officeDocument/2006/relationships" xmlns:p="http://schemas.openxmlformats.org/presentationml/2006/main">
   <p:cSld>
     <p:spTree>
@@ -28145,7 +28348,7 @@
 </p:sld>
 </file>
 
-<file path=ppt/slides/slide73.xml><?xml version="1.0" encoding="utf-8"?>
+<file path=ppt/slides/slide74.xml><?xml version="1.0" encoding="utf-8"?>
 <p:sld xmlns:a="http://schemas.openxmlformats.org/drawingml/2006/main" xmlns:r="http://schemas.openxmlformats.org/officeDocument/2006/relationships" xmlns:p="http://schemas.openxmlformats.org/presentationml/2006/main">
   <p:cSld>
     <p:spTree>
@@ -28575,7 +28778,7 @@
 </p:sld>
 </file>
 
-<file path=ppt/slides/slide74.xml><?xml version="1.0" encoding="utf-8"?>
+<file path=ppt/slides/slide75.xml><?xml version="1.0" encoding="utf-8"?>
 <p:sld xmlns:a="http://schemas.openxmlformats.org/drawingml/2006/main" xmlns:r="http://schemas.openxmlformats.org/officeDocument/2006/relationships" xmlns:p="http://schemas.openxmlformats.org/presentationml/2006/main">
   <p:cSld>
     <p:spTree>

--- a/Fall 2026/Week 3 -- Suffix Arrays BWT Alignment Tools File Formats.pptx
+++ b/Fall 2026/Week 3 -- Suffix Arrays BWT Alignment Tools File Formats.pptx
@@ -213,7 +213,7 @@
   <pc:docChgLst>
     <pc:chgData name="Aleksey Zimin" userId="7f2637d0bc515791" providerId="LiveId" clId="{5F359FD6-B8E9-41DA-90EC-0BA4FD0F3073}"/>
     <pc:docChg chg="undo custSel addSld delSld modSld">
-      <pc:chgData name="Aleksey Zimin" userId="7f2637d0bc515791" providerId="LiveId" clId="{5F359FD6-B8E9-41DA-90EC-0BA4FD0F3073}" dt="2026-09-16T18:47:23.810" v="763" actId="1076"/>
+      <pc:chgData name="Aleksey Zimin" userId="7f2637d0bc515791" providerId="LiveId" clId="{5F359FD6-B8E9-41DA-90EC-0BA4FD0F3073}" dt="2026-09-18T20:02:33.552" v="782" actId="14100"/>
       <pc:docMkLst>
         <pc:docMk/>
       </pc:docMkLst>
@@ -309,22 +309,6 @@
           <pc:docMk/>
           <pc:sldMk cId="1637561640" sldId="574"/>
         </pc:sldMkLst>
-        <pc:cxnChg chg="del mod">
-          <ac:chgData name="Aleksey Zimin" userId="7f2637d0bc515791" providerId="LiveId" clId="{5F359FD6-B8E9-41DA-90EC-0BA4FD0F3073}" dt="2026-09-16T18:10:32.025" v="645" actId="478"/>
-          <ac:cxnSpMkLst>
-            <pc:docMk/>
-            <pc:sldMk cId="1637561640" sldId="574"/>
-            <ac:cxnSpMk id="7" creationId="{118F5D7C-5221-C420-FB36-754E3ABB9EA0}"/>
-          </ac:cxnSpMkLst>
-        </pc:cxnChg>
-        <pc:cxnChg chg="del mod">
-          <ac:chgData name="Aleksey Zimin" userId="7f2637d0bc515791" providerId="LiveId" clId="{5F359FD6-B8E9-41DA-90EC-0BA4FD0F3073}" dt="2026-09-16T18:10:33.096" v="646" actId="478"/>
-          <ac:cxnSpMkLst>
-            <pc:docMk/>
-            <pc:sldMk cId="1637561640" sldId="574"/>
-            <ac:cxnSpMk id="8" creationId="{8D07E13E-7CC5-1E63-047C-C75E089E922B}"/>
-          </ac:cxnSpMkLst>
-        </pc:cxnChg>
       </pc:sldChg>
       <pc:sldChg chg="modSp mod">
         <pc:chgData name="Aleksey Zimin" userId="7f2637d0bc515791" providerId="LiveId" clId="{5F359FD6-B8E9-41DA-90EC-0BA4FD0F3073}" dt="2026-09-16T18:39:00.519" v="752" actId="1076"/>
@@ -341,34 +325,64 @@
           </ac:spMkLst>
         </pc:spChg>
       </pc:sldChg>
+      <pc:sldChg chg="addSp modSp mod">
+        <pc:chgData name="Aleksey Zimin" userId="7f2637d0bc515791" providerId="LiveId" clId="{5F359FD6-B8E9-41DA-90EC-0BA4FD0F3073}" dt="2026-09-18T20:02:03.816" v="770" actId="1076"/>
+        <pc:sldMkLst>
+          <pc:docMk/>
+          <pc:sldMk cId="1214437318" sldId="586"/>
+        </pc:sldMkLst>
+        <pc:picChg chg="mod">
+          <ac:chgData name="Aleksey Zimin" userId="7f2637d0bc515791" providerId="LiveId" clId="{5F359FD6-B8E9-41DA-90EC-0BA4FD0F3073}" dt="2026-09-18T20:02:00.280" v="769" actId="1076"/>
+          <ac:picMkLst>
+            <pc:docMk/>
+            <pc:sldMk cId="1214437318" sldId="586"/>
+            <ac:picMk id="5" creationId="{3532E6D1-ABE5-44A7-DDE0-E202871DFB8B}"/>
+          </ac:picMkLst>
+        </pc:picChg>
+        <pc:picChg chg="add mod">
+          <ac:chgData name="Aleksey Zimin" userId="7f2637d0bc515791" providerId="LiveId" clId="{5F359FD6-B8E9-41DA-90EC-0BA4FD0F3073}" dt="2026-09-18T20:02:03.816" v="770" actId="1076"/>
+          <ac:picMkLst>
+            <pc:docMk/>
+            <pc:sldMk cId="1214437318" sldId="586"/>
+            <ac:picMk id="6" creationId="{67807D81-8974-812F-8463-C65B30F35950}"/>
+          </ac:picMkLst>
+        </pc:picChg>
+      </pc:sldChg>
+      <pc:sldChg chg="addSp modSp mod">
+        <pc:chgData name="Aleksey Zimin" userId="7f2637d0bc515791" providerId="LiveId" clId="{5F359FD6-B8E9-41DA-90EC-0BA4FD0F3073}" dt="2026-09-18T20:02:33.552" v="782" actId="14100"/>
+        <pc:sldMkLst>
+          <pc:docMk/>
+          <pc:sldMk cId="4261880005" sldId="587"/>
+        </pc:sldMkLst>
+        <pc:picChg chg="add mod">
+          <ac:chgData name="Aleksey Zimin" userId="7f2637d0bc515791" providerId="LiveId" clId="{5F359FD6-B8E9-41DA-90EC-0BA4FD0F3073}" dt="2026-09-18T20:02:27.704" v="780" actId="14100"/>
+          <ac:picMkLst>
+            <pc:docMk/>
+            <pc:sldMk cId="4261880005" sldId="587"/>
+            <ac:picMk id="6" creationId="{76954887-FECF-573F-614C-FB51A21DBFC6}"/>
+          </ac:picMkLst>
+        </pc:picChg>
+        <pc:picChg chg="add mod">
+          <ac:chgData name="Aleksey Zimin" userId="7f2637d0bc515791" providerId="LiveId" clId="{5F359FD6-B8E9-41DA-90EC-0BA4FD0F3073}" dt="2026-09-18T20:02:33.552" v="782" actId="14100"/>
+          <ac:picMkLst>
+            <pc:docMk/>
+            <pc:sldMk cId="4261880005" sldId="587"/>
+            <ac:picMk id="9" creationId="{0E511542-D7C1-AEE7-B047-760FC54C261B}"/>
+          </ac:picMkLst>
+        </pc:picChg>
+      </pc:sldChg>
       <pc:sldChg chg="addSp delSp modSp add mod">
         <pc:chgData name="Aleksey Zimin" userId="7f2637d0bc515791" providerId="LiveId" clId="{5F359FD6-B8E9-41DA-90EC-0BA4FD0F3073}" dt="2026-09-16T18:47:23.810" v="763" actId="1076"/>
         <pc:sldMkLst>
           <pc:docMk/>
           <pc:sldMk cId="678657169" sldId="611"/>
         </pc:sldMkLst>
-        <pc:spChg chg="add del mod">
-          <ac:chgData name="Aleksey Zimin" userId="7f2637d0bc515791" providerId="LiveId" clId="{5F359FD6-B8E9-41DA-90EC-0BA4FD0F3073}" dt="2026-09-16T18:46:33.026" v="755" actId="478"/>
-          <ac:spMkLst>
-            <pc:docMk/>
-            <pc:sldMk cId="678657169" sldId="611"/>
-            <ac:spMk id="4" creationId="{C40AADA6-D0C8-4764-FA21-9D4F2866868C}"/>
-          </ac:spMkLst>
-        </pc:spChg>
         <pc:spChg chg="add mod">
           <ac:chgData name="Aleksey Zimin" userId="7f2637d0bc515791" providerId="LiveId" clId="{5F359FD6-B8E9-41DA-90EC-0BA4FD0F3073}" dt="2026-09-16T18:47:19.495" v="762" actId="1076"/>
           <ac:spMkLst>
             <pc:docMk/>
             <pc:sldMk cId="678657169" sldId="611"/>
             <ac:spMk id="7" creationId="{DFAEE5DB-844A-518B-4ADA-7E092D586532}"/>
-          </ac:spMkLst>
-        </pc:spChg>
-        <pc:spChg chg="del">
-          <ac:chgData name="Aleksey Zimin" userId="7f2637d0bc515791" providerId="LiveId" clId="{5F359FD6-B8E9-41DA-90EC-0BA4FD0F3073}" dt="2026-09-16T18:46:30.607" v="754" actId="478"/>
-          <ac:spMkLst>
-            <pc:docMk/>
-            <pc:sldMk cId="678657169" sldId="611"/>
-            <ac:spMk id="11" creationId="{CFD97BA8-1602-5AE1-52D1-39DDAFF69DF9}"/>
           </ac:spMkLst>
         </pc:spChg>
         <pc:picChg chg="add mod">
@@ -467,7 +481,7 @@
           <a:p>
             <a:fld id="{78C61B90-1233-4265-A8E1-4CB85DE126FB}" type="datetimeFigureOut">
               <a:rPr lang="en-US" smtClean="0"/>
-              <a:t>9/16/2026</a:t>
+              <a:t>9/18/2026</a:t>
             </a:fld>
             <a:endParaRPr lang="en-US"/>
           </a:p>
@@ -1029,7 +1043,7 @@
           <a:p>
             <a:fld id="{E2773EFF-6084-460D-96FA-2FA787A98816}" type="datetime1">
               <a:rPr lang="en-US" smtClean="0"/>
-              <a:t>9/16/2026</a:t>
+              <a:t>9/18/2026</a:t>
             </a:fld>
             <a:endParaRPr lang="en-US"/>
           </a:p>
@@ -1282,7 +1296,7 @@
           <a:p>
             <a:fld id="{013692F8-B2BD-4E07-9A92-E5080B238DFA}" type="datetime1">
               <a:rPr lang="en-US" smtClean="0"/>
-              <a:t>9/16/2026</a:t>
+              <a:t>9/18/2026</a:t>
             </a:fld>
             <a:endParaRPr lang="en-US"/>
           </a:p>
@@ -1451,7 +1465,7 @@
           <a:p>
             <a:fld id="{82A88673-6F42-4090-A040-176AF0E6DEAE}" type="datetime1">
               <a:rPr lang="en-US" smtClean="0"/>
-              <a:t>9/16/2026</a:t>
+              <a:t>9/18/2026</a:t>
             </a:fld>
             <a:endParaRPr lang="en-US"/>
           </a:p>
@@ -1630,7 +1644,7 @@
           <a:p>
             <a:fld id="{EC715288-B7FB-4510-97B0-C840A6671DDD}" type="datetime1">
               <a:rPr lang="en-US" smtClean="0"/>
-              <a:t>9/16/2026</a:t>
+              <a:t>9/18/2026</a:t>
             </a:fld>
             <a:endParaRPr lang="en-US"/>
           </a:p>
@@ -2291,7 +2305,7 @@
           <a:p>
             <a:fld id="{93FF86A1-0F17-41D8-9FFA-9520AF33BFC6}" type="datetime1">
               <a:rPr lang="en-US" smtClean="0"/>
-              <a:t>9/16/2026</a:t>
+              <a:t>9/18/2026</a:t>
             </a:fld>
             <a:endParaRPr lang="en-US"/>
           </a:p>
@@ -2526,7 +2540,7 @@
           <a:p>
             <a:fld id="{E41692F4-087A-4F4C-9829-F340F0646973}" type="datetime1">
               <a:rPr lang="en-US" smtClean="0"/>
-              <a:t>9/16/2026</a:t>
+              <a:t>9/18/2026</a:t>
             </a:fld>
             <a:endParaRPr lang="en-US"/>
           </a:p>
@@ -2772,7 +2786,7 @@
           <a:p>
             <a:fld id="{93E80BFE-E826-4B70-BF6B-3710B05194AF}" type="datetime1">
               <a:rPr lang="en-US" smtClean="0"/>
-              <a:t>9/16/2026</a:t>
+              <a:t>9/18/2026</a:t>
             </a:fld>
             <a:endParaRPr lang="en-US"/>
           </a:p>
@@ -3058,7 +3072,7 @@
           <a:p>
             <a:fld id="{9C5182DA-5425-42F9-BDB8-0DBDA15B981E}" type="datetime1">
               <a:rPr lang="en-US" smtClean="0"/>
-              <a:t>9/16/2026</a:t>
+              <a:t>9/18/2026</a:t>
             </a:fld>
             <a:endParaRPr lang="en-US"/>
           </a:p>
@@ -3557,7 +3571,7 @@
           <a:p>
             <a:fld id="{131B7164-C7F7-495E-9D5F-43BBDEBECF81}" type="datetime1">
               <a:rPr lang="en-US" smtClean="0"/>
-              <a:t>9/16/2026</a:t>
+              <a:t>9/18/2026</a:t>
             </a:fld>
             <a:endParaRPr lang="en-US"/>
           </a:p>
@@ -3675,7 +3689,7 @@
           <a:p>
             <a:fld id="{2D6C5AB8-78AA-4DA3-952F-F5057D2DAAA5}" type="datetime1">
               <a:rPr lang="en-US" smtClean="0"/>
-              <a:t>9/16/2026</a:t>
+              <a:t>9/18/2026</a:t>
             </a:fld>
             <a:endParaRPr lang="en-US"/>
           </a:p>
@@ -3771,7 +3785,7 @@
           <a:p>
             <a:fld id="{41CCB869-D2D8-4282-A525-D63712C1B900}" type="datetime1">
               <a:rPr lang="en-US" smtClean="0"/>
-              <a:t>9/16/2026</a:t>
+              <a:t>9/18/2026</a:t>
             </a:fld>
             <a:endParaRPr lang="en-US"/>
           </a:p>
@@ -4047,7 +4061,7 @@
           <a:p>
             <a:fld id="{25A8CF58-29B0-4D31-BE55-D9C1F05848B7}" type="datetime1">
               <a:rPr lang="en-US" smtClean="0"/>
-              <a:t>9/16/2026</a:t>
+              <a:t>9/18/2026</a:t>
             </a:fld>
             <a:endParaRPr lang="en-US"/>
           </a:p>
@@ -4268,7 +4282,7 @@
           <a:p>
             <a:fld id="{8F08395F-151A-4402-98B5-C84E535B9AEF}" type="datetime1">
               <a:rPr lang="en-US" smtClean="0"/>
-              <a:t>9/16/2026</a:t>
+              <a:t>9/18/2026</a:t>
             </a:fld>
             <a:endParaRPr lang="en-US"/>
           </a:p>
@@ -23516,7 +23530,7 @@
         </p:blipFill>
         <p:spPr>
           <a:xfrm>
-            <a:off x="6096000" y="1597306"/>
+            <a:off x="6172944" y="2888353"/>
             <a:ext cx="5649113" cy="2591162"/>
           </a:xfrm>
           <a:prstGeom prst="rect">
@@ -23548,6 +23562,42 @@
           <a:xfrm>
             <a:off x="369943" y="2892887"/>
             <a:ext cx="5334744" cy="2029108"/>
+          </a:xfrm>
+          <a:prstGeom prst="rect">
+            <a:avLst/>
+          </a:prstGeom>
+        </p:spPr>
+      </p:pic>
+      <p:pic>
+        <p:nvPicPr>
+          <p:cNvPr id="6" name="Picture 5">
+            <a:extLst>
+              <a:ext uri="{FF2B5EF4-FFF2-40B4-BE49-F238E27FC236}">
+                <a16:creationId xmlns:a16="http://schemas.microsoft.com/office/drawing/2014/main" id="{67807D81-8974-812F-8463-C65B30F35950}"/>
+              </a:ext>
+            </a:extLst>
+          </p:cNvPr>
+          <p:cNvPicPr>
+            <a:picLocks noChangeAspect="1"/>
+          </p:cNvPicPr>
+          <p:nvPr/>
+        </p:nvPicPr>
+        <p:blipFill>
+          <a:blip r:embed="rId4">
+            <a:extLst>
+              <a:ext uri="{28A0092B-C50C-407E-A947-70E740481C1C}">
+                <a14:useLocalDpi xmlns:a14="http://schemas.microsoft.com/office/drawing/2010/main" val="0"/>
+              </a:ext>
+            </a:extLst>
+          </a:blip>
+          <a:stretch>
+            <a:fillRect/>
+          </a:stretch>
+        </p:blipFill>
+        <p:spPr>
+          <a:xfrm>
+            <a:off x="9943797" y="611812"/>
+            <a:ext cx="1861751" cy="1970987"/>
           </a:xfrm>
           <a:prstGeom prst="rect">
             <a:avLst/>
@@ -24561,6 +24611,78 @@
           <a:xfrm>
             <a:off x="5882618" y="2750872"/>
             <a:ext cx="6216127" cy="3875216"/>
+          </a:xfrm>
+          <a:prstGeom prst="rect">
+            <a:avLst/>
+          </a:prstGeom>
+        </p:spPr>
+      </p:pic>
+      <p:pic>
+        <p:nvPicPr>
+          <p:cNvPr id="6" name="Picture 5">
+            <a:extLst>
+              <a:ext uri="{FF2B5EF4-FFF2-40B4-BE49-F238E27FC236}">
+                <a16:creationId xmlns:a16="http://schemas.microsoft.com/office/drawing/2014/main" id="{76954887-FECF-573F-614C-FB51A21DBFC6}"/>
+              </a:ext>
+            </a:extLst>
+          </p:cNvPr>
+          <p:cNvPicPr>
+            <a:picLocks noChangeAspect="1"/>
+          </p:cNvPicPr>
+          <p:nvPr/>
+        </p:nvPicPr>
+        <p:blipFill>
+          <a:blip r:embed="rId4">
+            <a:extLst>
+              <a:ext uri="{28A0092B-C50C-407E-A947-70E740481C1C}">
+                <a14:useLocalDpi xmlns:a14="http://schemas.microsoft.com/office/drawing/2010/main" val="0"/>
+              </a:ext>
+            </a:extLst>
+          </a:blip>
+          <a:stretch>
+            <a:fillRect/>
+          </a:stretch>
+        </p:blipFill>
+        <p:spPr>
+          <a:xfrm>
+            <a:off x="9984259" y="87508"/>
+            <a:ext cx="1959633" cy="2074611"/>
+          </a:xfrm>
+          <a:prstGeom prst="rect">
+            <a:avLst/>
+          </a:prstGeom>
+        </p:spPr>
+      </p:pic>
+      <p:pic>
+        <p:nvPicPr>
+          <p:cNvPr id="9" name="Picture 8">
+            <a:extLst>
+              <a:ext uri="{FF2B5EF4-FFF2-40B4-BE49-F238E27FC236}">
+                <a16:creationId xmlns:a16="http://schemas.microsoft.com/office/drawing/2014/main" id="{0E511542-D7C1-AEE7-B047-760FC54C261B}"/>
+              </a:ext>
+            </a:extLst>
+          </p:cNvPr>
+          <p:cNvPicPr>
+            <a:picLocks noChangeAspect="1"/>
+          </p:cNvPicPr>
+          <p:nvPr/>
+        </p:nvPicPr>
+        <p:blipFill>
+          <a:blip r:embed="rId5">
+            <a:extLst>
+              <a:ext uri="{28A0092B-C50C-407E-A947-70E740481C1C}">
+                <a14:useLocalDpi xmlns:a14="http://schemas.microsoft.com/office/drawing/2010/main" val="0"/>
+              </a:ext>
+            </a:extLst>
+          </a:blip>
+          <a:stretch>
+            <a:fillRect/>
+          </a:stretch>
+        </p:blipFill>
+        <p:spPr>
+          <a:xfrm>
+            <a:off x="7473011" y="87508"/>
+            <a:ext cx="2138775" cy="2074611"/>
           </a:xfrm>
           <a:prstGeom prst="rect">
             <a:avLst/>
